--- a/output_pptx/Promises.pptx
+++ b/output_pptx/Promises.pptx
@@ -3120,23 +3120,23 @@
         </p:nvSpPr>
         <p:spPr>
           <a:xfrm>
-            <a:off x="594360" y="2258568"/>
-            <a:ext cx="11002975" cy="685800"/>
-          </a:xfrm>
-          <a:prstGeom prst="rect">
-            <a:avLst/>
-          </a:prstGeom>
-          <a:noFill/>
-        </p:spPr>
-        <p:txBody>
-          <a:bodyPr wrap="square">
-            <a:spAutoFit/>
-          </a:bodyPr>
-          <a:lstStyle/>
-          <a:p>
-            <a:pPr algn="ctr"/>
-            <a:r>
-              <a:rPr sz="3434" b="1" i="0">
+            <a:off x="640080" y="2052828"/>
+            <a:ext cx="10911535" cy="731520"/>
+          </a:xfrm>
+          <a:prstGeom prst="rect">
+            <a:avLst/>
+          </a:prstGeom>
+          <a:noFill/>
+        </p:spPr>
+        <p:txBody>
+          <a:bodyPr wrap="square">
+            <a:spAutoFit/>
+          </a:bodyPr>
+          <a:lstStyle/>
+          <a:p>
+            <a:pPr algn="ctr"/>
+            <a:r>
+              <a:rPr sz="3700" b="1" i="0">
                 <a:solidFill>
                   <a:srgbClr val="FFFFFF"/>
                 </a:solidFill>
@@ -3155,25 +3155,60 @@
         </p:nvSpPr>
         <p:spPr>
           <a:xfrm>
-            <a:off x="594360" y="2980944"/>
-            <a:ext cx="11002975" cy="347472"/>
-          </a:xfrm>
-          <a:prstGeom prst="rect">
-            <a:avLst/>
-          </a:prstGeom>
-          <a:noFill/>
-        </p:spPr>
-        <p:txBody>
-          <a:bodyPr wrap="square">
-            <a:spAutoFit/>
-          </a:bodyPr>
-          <a:lstStyle/>
-          <a:p>
-            <a:pPr algn="ctr"/>
-            <a:r>
-              <a:rPr sz="2200" b="0" i="1">
-                <a:solidFill>
-                  <a:srgbClr val="8C8C8C"/>
+            <a:off x="640080" y="2985516"/>
+            <a:ext cx="10911535" cy="731520"/>
+          </a:xfrm>
+          <a:prstGeom prst="rect">
+            <a:avLst/>
+          </a:prstGeom>
+          <a:noFill/>
+        </p:spPr>
+        <p:txBody>
+          <a:bodyPr wrap="square">
+            <a:spAutoFit/>
+          </a:bodyPr>
+          <a:lstStyle/>
+          <a:p>
+            <a:pPr algn="ctr"/>
+            <a:r>
+              <a:rPr sz="4300" b="1" i="0">
+                <a:solidFill>
+                  <a:srgbClr val="FFFFFF"/>
+                </a:solidFill>
+                <a:latin typeface="Arial"/>
+              </a:rPr>
+              <a:t>Eu aprendi o que significa obedecer</a:t>
+            </a:r>
+          </a:p>
+        </p:txBody>
+      </p:sp>
+      <p:sp>
+        <p:nvSpPr>
+          <p:cNvPr id="4" name="TextBox 3"/>
+          <p:cNvSpPr txBox="1"/>
+          <p:nvPr/>
+        </p:nvSpPr>
+        <p:spPr>
+          <a:xfrm>
+            <a:off x="640080" y="4128516"/>
+            <a:ext cx="10911535" cy="310896"/>
+          </a:xfrm>
+          <a:prstGeom prst="rect">
+            <a:avLst/>
+          </a:prstGeom>
+          <a:noFill/>
+        </p:spPr>
+        <p:txBody>
+          <a:bodyPr wrap="square">
+            <a:spAutoFit/>
+          </a:bodyPr>
+          <a:lstStyle/>
+          <a:p>
+            <a:pPr algn="ctr"/>
+            <a:r>
+              <a:rPr sz="2000" b="0" i="0">
+                <a:solidFill>
+                  <a:srgbClr val="828282"/>
                 </a:solidFill>
                 <a:latin typeface="Arial"/>
               </a:rPr>
@@ -3184,66 +3219,31 @@
       </p:sp>
       <p:sp>
         <p:nvSpPr>
-          <p:cNvPr id="4" name="TextBox 3"/>
-          <p:cNvSpPr txBox="1"/>
-          <p:nvPr/>
-        </p:nvSpPr>
-        <p:spPr>
-          <a:xfrm>
-            <a:off x="594360" y="3529584"/>
-            <a:ext cx="11002975" cy="685800"/>
-          </a:xfrm>
-          <a:prstGeom prst="rect">
-            <a:avLst/>
-          </a:prstGeom>
-          <a:noFill/>
-        </p:spPr>
-        <p:txBody>
-          <a:bodyPr wrap="square">
-            <a:spAutoFit/>
-          </a:bodyPr>
-          <a:lstStyle/>
-          <a:p>
-            <a:pPr algn="ctr"/>
-            <a:r>
-              <a:rPr sz="4022" b="1" i="0">
-                <a:solidFill>
-                  <a:srgbClr val="FFFFFF"/>
-                </a:solidFill>
-                <a:latin typeface="Arial"/>
-              </a:rPr>
-              <a:t>Eu aprendi o que significa obedecer</a:t>
-            </a:r>
-          </a:p>
-        </p:txBody>
-      </p:sp>
-      <p:sp>
-        <p:nvSpPr>
           <p:cNvPr id="5" name="TextBox 4"/>
           <p:cNvSpPr txBox="1"/>
           <p:nvPr/>
         </p:nvSpPr>
         <p:spPr>
           <a:xfrm>
-            <a:off x="594360" y="4251960"/>
-            <a:ext cx="11002975" cy="347472"/>
-          </a:xfrm>
-          <a:prstGeom prst="rect">
-            <a:avLst/>
-          </a:prstGeom>
-          <a:noFill/>
-        </p:spPr>
-        <p:txBody>
-          <a:bodyPr wrap="square">
-            <a:spAutoFit/>
-          </a:bodyPr>
-          <a:lstStyle/>
-          <a:p>
-            <a:pPr algn="ctr"/>
-            <a:r>
-              <a:rPr sz="2200" b="0" i="1">
-                <a:solidFill>
-                  <a:srgbClr val="8C8C8C"/>
+            <a:off x="640080" y="4494276"/>
+            <a:ext cx="10911535" cy="310896"/>
+          </a:xfrm>
+          <a:prstGeom prst="rect">
+            <a:avLst/>
+          </a:prstGeom>
+          <a:noFill/>
+        </p:spPr>
+        <p:txBody>
+          <a:bodyPr wrap="square">
+            <a:spAutoFit/>
+          </a:bodyPr>
+          <a:lstStyle/>
+          <a:p>
+            <a:pPr algn="ctr"/>
+            <a:r>
+              <a:rPr sz="2000" b="0" i="0">
+                <a:solidFill>
+                  <a:srgbClr val="828282"/>
                 </a:solidFill>
                 <a:latin typeface="Arial"/>
               </a:rPr>
@@ -3286,23 +3286,23 @@
         </p:nvSpPr>
         <p:spPr>
           <a:xfrm>
-            <a:off x="594360" y="1837944"/>
-            <a:ext cx="11002975" cy="685800"/>
-          </a:xfrm>
-          <a:prstGeom prst="rect">
-            <a:avLst/>
-          </a:prstGeom>
-          <a:noFill/>
-        </p:spPr>
-        <p:txBody>
-          <a:bodyPr wrap="square">
-            <a:spAutoFit/>
-          </a:bodyPr>
-          <a:lstStyle/>
-          <a:p>
-            <a:pPr algn="ctr"/>
-            <a:r>
-              <a:rPr sz="4400" b="1" i="0">
+            <a:off x="640080" y="1650492"/>
+            <a:ext cx="10911535" cy="731520"/>
+          </a:xfrm>
+          <a:prstGeom prst="rect">
+            <a:avLst/>
+          </a:prstGeom>
+          <a:noFill/>
+        </p:spPr>
+        <p:txBody>
+          <a:bodyPr wrap="square">
+            <a:spAutoFit/>
+          </a:bodyPr>
+          <a:lstStyle/>
+          <a:p>
+            <a:pPr algn="ctr"/>
+            <a:r>
+              <a:rPr sz="4800" b="1" i="0">
                 <a:solidFill>
                   <a:srgbClr val="FFFFFF"/>
                 </a:solidFill>
@@ -3321,8 +3321,8 @@
         </p:nvSpPr>
         <p:spPr>
           <a:xfrm>
-            <a:off x="594360" y="2560320"/>
-            <a:ext cx="11002975" cy="384048"/>
+            <a:off x="640080" y="2418588"/>
+            <a:ext cx="10911535" cy="365760"/>
           </a:xfrm>
           <a:prstGeom prst="rect">
             <a:avLst/>
@@ -3339,7 +3339,7 @@
             <a:r>
               <a:rPr sz="2400" b="0" i="1">
                 <a:solidFill>
-                  <a:srgbClr val="B4B4B4"/>
+                  <a:srgbClr val="AAAAAA"/>
                 </a:solidFill>
                 <a:latin typeface="Arial"/>
               </a:rPr>
@@ -3356,8 +3356,78 @@
         </p:nvSpPr>
         <p:spPr>
           <a:xfrm>
-            <a:off x="594360" y="2980944"/>
-            <a:ext cx="11002975" cy="347472"/>
+            <a:off x="640080" y="2985516"/>
+            <a:ext cx="10911535" cy="731520"/>
+          </a:xfrm>
+          <a:prstGeom prst="rect">
+            <a:avLst/>
+          </a:prstGeom>
+          <a:noFill/>
+        </p:spPr>
+        <p:txBody>
+          <a:bodyPr wrap="square">
+            <a:spAutoFit/>
+          </a:bodyPr>
+          <a:lstStyle/>
+          <a:p>
+            <a:pPr algn="ctr"/>
+            <a:r>
+              <a:rPr sz="4800" b="1" i="0">
+                <a:solidFill>
+                  <a:srgbClr val="FFFFFF"/>
+                </a:solidFill>
+                <a:latin typeface="Arial"/>
+              </a:rPr>
+              <a:t>私に忠実な主</a:t>
+            </a:r>
+          </a:p>
+        </p:txBody>
+      </p:sp>
+      <p:sp>
+        <p:nvSpPr>
+          <p:cNvPr id="5" name="TextBox 4"/>
+          <p:cNvSpPr txBox="1"/>
+          <p:nvPr/>
+        </p:nvSpPr>
+        <p:spPr>
+          <a:xfrm>
+            <a:off x="640080" y="3753612"/>
+            <a:ext cx="10911535" cy="365760"/>
+          </a:xfrm>
+          <a:prstGeom prst="rect">
+            <a:avLst/>
+          </a:prstGeom>
+          <a:noFill/>
+        </p:spPr>
+        <p:txBody>
+          <a:bodyPr wrap="square">
+            <a:spAutoFit/>
+          </a:bodyPr>
+          <a:lstStyle/>
+          <a:p>
+            <a:pPr algn="ctr"/>
+            <a:r>
+              <a:rPr sz="2400" b="0" i="1">
+                <a:solidFill>
+                  <a:srgbClr val="AAAAAA"/>
+                </a:solidFill>
+                <a:latin typeface="Arial"/>
+              </a:rPr>
+              <a:t>watashi ni chujitsuna shu</a:t>
+            </a:r>
+          </a:p>
+        </p:txBody>
+      </p:sp>
+      <p:sp>
+        <p:nvSpPr>
+          <p:cNvPr id="6" name="TextBox 5"/>
+          <p:cNvSpPr txBox="1"/>
+          <p:nvPr/>
+        </p:nvSpPr>
+        <p:spPr>
+          <a:xfrm>
+            <a:off x="640080" y="4530852"/>
+            <a:ext cx="10911535" cy="310896"/>
           </a:xfrm>
           <a:prstGeom prst="rect">
             <a:avLst/>
@@ -3374,7 +3444,7 @@
             <a:r>
               <a:rPr sz="2000" b="0" i="1">
                 <a:solidFill>
-                  <a:srgbClr val="8C8C8C"/>
+                  <a:srgbClr val="828282"/>
                 </a:solidFill>
                 <a:latin typeface="Arial"/>
               </a:rPr>
@@ -3385,84 +3455,14 @@
       </p:sp>
       <p:sp>
         <p:nvSpPr>
-          <p:cNvPr id="5" name="TextBox 4"/>
-          <p:cNvSpPr txBox="1"/>
-          <p:nvPr/>
-        </p:nvSpPr>
-        <p:spPr>
-          <a:xfrm>
-            <a:off x="594360" y="3529584"/>
-            <a:ext cx="11002975" cy="685800"/>
-          </a:xfrm>
-          <a:prstGeom prst="rect">
-            <a:avLst/>
-          </a:prstGeom>
-          <a:noFill/>
-        </p:spPr>
-        <p:txBody>
-          <a:bodyPr wrap="square">
-            <a:spAutoFit/>
-          </a:bodyPr>
-          <a:lstStyle/>
-          <a:p>
-            <a:pPr algn="ctr"/>
-            <a:r>
-              <a:rPr sz="4400" b="1" i="0">
-                <a:solidFill>
-                  <a:srgbClr val="FFFFFF"/>
-                </a:solidFill>
-                <a:latin typeface="Arial"/>
-              </a:rPr>
-              <a:t>私に忠実な主</a:t>
-            </a:r>
-          </a:p>
-        </p:txBody>
-      </p:sp>
-      <p:sp>
-        <p:nvSpPr>
-          <p:cNvPr id="6" name="TextBox 5"/>
-          <p:cNvSpPr txBox="1"/>
-          <p:nvPr/>
-        </p:nvSpPr>
-        <p:spPr>
-          <a:xfrm>
-            <a:off x="594360" y="4251960"/>
-            <a:ext cx="11002975" cy="384048"/>
-          </a:xfrm>
-          <a:prstGeom prst="rect">
-            <a:avLst/>
-          </a:prstGeom>
-          <a:noFill/>
-        </p:spPr>
-        <p:txBody>
-          <a:bodyPr wrap="square">
-            <a:spAutoFit/>
-          </a:bodyPr>
-          <a:lstStyle/>
-          <a:p>
-            <a:pPr algn="ctr"/>
-            <a:r>
-              <a:rPr sz="2400" b="0" i="1">
-                <a:solidFill>
-                  <a:srgbClr val="B4B4B4"/>
-                </a:solidFill>
-                <a:latin typeface="Arial"/>
-              </a:rPr>
-              <a:t>watashi ni chujitsuna shu</a:t>
-            </a:r>
-          </a:p>
-        </p:txBody>
-      </p:sp>
-      <p:sp>
-        <p:nvSpPr>
           <p:cNvPr id="7" name="TextBox 6"/>
           <p:cNvSpPr txBox="1"/>
           <p:nvPr/>
         </p:nvSpPr>
         <p:spPr>
           <a:xfrm>
-            <a:off x="594360" y="4672584"/>
-            <a:ext cx="11002975" cy="347472"/>
+            <a:off x="640080" y="4896612"/>
+            <a:ext cx="10911535" cy="310896"/>
           </a:xfrm>
           <a:prstGeom prst="rect">
             <a:avLst/>
@@ -3479,7 +3479,7 @@
             <a:r>
               <a:rPr sz="2000" b="0" i="1">
                 <a:solidFill>
-                  <a:srgbClr val="8C8C8C"/>
+                  <a:srgbClr val="828282"/>
                 </a:solidFill>
                 <a:latin typeface="Arial"/>
               </a:rPr>
@@ -3522,23 +3522,23 @@
         </p:nvSpPr>
         <p:spPr>
           <a:xfrm>
-            <a:off x="594360" y="1837944"/>
-            <a:ext cx="11002975" cy="685800"/>
-          </a:xfrm>
-          <a:prstGeom prst="rect">
-            <a:avLst/>
-          </a:prstGeom>
-          <a:noFill/>
-        </p:spPr>
-        <p:txBody>
-          <a:bodyPr wrap="square">
-            <a:spAutoFit/>
-          </a:bodyPr>
-          <a:lstStyle/>
-          <a:p>
-            <a:pPr algn="ctr"/>
-            <a:r>
-              <a:rPr sz="4400" b="1" i="0">
+            <a:off x="640080" y="1650492"/>
+            <a:ext cx="10911535" cy="731520"/>
+          </a:xfrm>
+          <a:prstGeom prst="rect">
+            <a:avLst/>
+          </a:prstGeom>
+          <a:noFill/>
+        </p:spPr>
+        <p:txBody>
+          <a:bodyPr wrap="square">
+            <a:spAutoFit/>
+          </a:bodyPr>
+          <a:lstStyle/>
+          <a:p>
+            <a:pPr algn="ctr"/>
+            <a:r>
+              <a:rPr sz="4800" b="1" i="0">
                 <a:solidFill>
                   <a:srgbClr val="FFFFFF"/>
                 </a:solidFill>
@@ -3557,8 +3557,8 @@
         </p:nvSpPr>
         <p:spPr>
           <a:xfrm>
-            <a:off x="594360" y="2560320"/>
-            <a:ext cx="11002975" cy="384048"/>
+            <a:off x="640080" y="2418588"/>
+            <a:ext cx="10911535" cy="365760"/>
           </a:xfrm>
           <a:prstGeom prst="rect">
             <a:avLst/>
@@ -3575,7 +3575,7 @@
             <a:r>
               <a:rPr sz="2400" b="0" i="1">
                 <a:solidFill>
-                  <a:srgbClr val="B4B4B4"/>
+                  <a:srgbClr val="AAAAAA"/>
                 </a:solidFill>
                 <a:latin typeface="Arial"/>
               </a:rPr>
@@ -3592,8 +3592,78 @@
         </p:nvSpPr>
         <p:spPr>
           <a:xfrm>
-            <a:off x="594360" y="2980944"/>
-            <a:ext cx="11002975" cy="347472"/>
+            <a:off x="640080" y="2985516"/>
+            <a:ext cx="10911535" cy="731520"/>
+          </a:xfrm>
+          <a:prstGeom prst="rect">
+            <a:avLst/>
+          </a:prstGeom>
+          <a:noFill/>
+        </p:spPr>
+        <p:txBody>
+          <a:bodyPr wrap="square">
+            <a:spAutoFit/>
+          </a:bodyPr>
+          <a:lstStyle/>
+          <a:p>
+            <a:pPr algn="ctr"/>
+            <a:r>
+              <a:rPr sz="4800" b="1" i="0">
+                <a:solidFill>
+                  <a:srgbClr val="FFFFFF"/>
+                </a:solidFill>
+                <a:latin typeface="Arial"/>
+              </a:rPr>
+              <a:t>貴方は忠実な主</a:t>
+            </a:r>
+          </a:p>
+        </p:txBody>
+      </p:sp>
+      <p:sp>
+        <p:nvSpPr>
+          <p:cNvPr id="5" name="TextBox 4"/>
+          <p:cNvSpPr txBox="1"/>
+          <p:nvPr/>
+        </p:nvSpPr>
+        <p:spPr>
+          <a:xfrm>
+            <a:off x="640080" y="3753612"/>
+            <a:ext cx="10911535" cy="365760"/>
+          </a:xfrm>
+          <a:prstGeom prst="rect">
+            <a:avLst/>
+          </a:prstGeom>
+          <a:noFill/>
+        </p:spPr>
+        <p:txBody>
+          <a:bodyPr wrap="square">
+            <a:spAutoFit/>
+          </a:bodyPr>
+          <a:lstStyle/>
+          <a:p>
+            <a:pPr algn="ctr"/>
+            <a:r>
+              <a:rPr sz="2400" b="0" i="1">
+                <a:solidFill>
+                  <a:srgbClr val="AAAAAA"/>
+                </a:solidFill>
+                <a:latin typeface="Arial"/>
+              </a:rPr>
+              <a:t>anata wa chujitsu na shu</a:t>
+            </a:r>
+          </a:p>
+        </p:txBody>
+      </p:sp>
+      <p:sp>
+        <p:nvSpPr>
+          <p:cNvPr id="6" name="TextBox 5"/>
+          <p:cNvSpPr txBox="1"/>
+          <p:nvPr/>
+        </p:nvSpPr>
+        <p:spPr>
+          <a:xfrm>
+            <a:off x="640080" y="4530852"/>
+            <a:ext cx="10911535" cy="310896"/>
           </a:xfrm>
           <a:prstGeom prst="rect">
             <a:avLst/>
@@ -3610,7 +3680,7 @@
             <a:r>
               <a:rPr sz="2000" b="0" i="1">
                 <a:solidFill>
-                  <a:srgbClr val="8C8C8C"/>
+                  <a:srgbClr val="828282"/>
                 </a:solidFill>
                 <a:latin typeface="Arial"/>
               </a:rPr>
@@ -3621,84 +3691,14 @@
       </p:sp>
       <p:sp>
         <p:nvSpPr>
-          <p:cNvPr id="5" name="TextBox 4"/>
-          <p:cNvSpPr txBox="1"/>
-          <p:nvPr/>
-        </p:nvSpPr>
-        <p:spPr>
-          <a:xfrm>
-            <a:off x="594360" y="3529584"/>
-            <a:ext cx="11002975" cy="685800"/>
-          </a:xfrm>
-          <a:prstGeom prst="rect">
-            <a:avLst/>
-          </a:prstGeom>
-          <a:noFill/>
-        </p:spPr>
-        <p:txBody>
-          <a:bodyPr wrap="square">
-            <a:spAutoFit/>
-          </a:bodyPr>
-          <a:lstStyle/>
-          <a:p>
-            <a:pPr algn="ctr"/>
-            <a:r>
-              <a:rPr sz="4400" b="1" i="0">
-                <a:solidFill>
-                  <a:srgbClr val="FFFFFF"/>
-                </a:solidFill>
-                <a:latin typeface="Arial"/>
-              </a:rPr>
-              <a:t>貴方は忠実な主</a:t>
-            </a:r>
-          </a:p>
-        </p:txBody>
-      </p:sp>
-      <p:sp>
-        <p:nvSpPr>
-          <p:cNvPr id="6" name="TextBox 5"/>
-          <p:cNvSpPr txBox="1"/>
-          <p:nvPr/>
-        </p:nvSpPr>
-        <p:spPr>
-          <a:xfrm>
-            <a:off x="594360" y="4251960"/>
-            <a:ext cx="11002975" cy="384048"/>
-          </a:xfrm>
-          <a:prstGeom prst="rect">
-            <a:avLst/>
-          </a:prstGeom>
-          <a:noFill/>
-        </p:spPr>
-        <p:txBody>
-          <a:bodyPr wrap="square">
-            <a:spAutoFit/>
-          </a:bodyPr>
-          <a:lstStyle/>
-          <a:p>
-            <a:pPr algn="ctr"/>
-            <a:r>
-              <a:rPr sz="2400" b="0" i="1">
-                <a:solidFill>
-                  <a:srgbClr val="B4B4B4"/>
-                </a:solidFill>
-                <a:latin typeface="Arial"/>
-              </a:rPr>
-              <a:t>anata wa chujitsu na shu</a:t>
-            </a:r>
-          </a:p>
-        </p:txBody>
-      </p:sp>
-      <p:sp>
-        <p:nvSpPr>
           <p:cNvPr id="7" name="TextBox 6"/>
           <p:cNvSpPr txBox="1"/>
           <p:nvPr/>
         </p:nvSpPr>
         <p:spPr>
           <a:xfrm>
-            <a:off x="594360" y="4672584"/>
-            <a:ext cx="11002975" cy="347472"/>
+            <a:off x="640080" y="4896612"/>
+            <a:ext cx="10911535" cy="310896"/>
           </a:xfrm>
           <a:prstGeom prst="rect">
             <a:avLst/>
@@ -3715,7 +3715,7 @@
             <a:r>
               <a:rPr sz="2000" b="0" i="1">
                 <a:solidFill>
-                  <a:srgbClr val="8C8C8C"/>
+                  <a:srgbClr val="828282"/>
                 </a:solidFill>
                 <a:latin typeface="Arial"/>
               </a:rPr>
@@ -3758,23 +3758,23 @@
         </p:nvSpPr>
         <p:spPr>
           <a:xfrm>
-            <a:off x="594360" y="1837944"/>
-            <a:ext cx="11002975" cy="685800"/>
-          </a:xfrm>
-          <a:prstGeom prst="rect">
-            <a:avLst/>
-          </a:prstGeom>
-          <a:noFill/>
-        </p:spPr>
-        <p:txBody>
-          <a:bodyPr wrap="square">
-            <a:spAutoFit/>
-          </a:bodyPr>
-          <a:lstStyle/>
-          <a:p>
-            <a:pPr algn="ctr"/>
-            <a:r>
-              <a:rPr sz="4400" b="1" i="0">
+            <a:off x="640080" y="1650492"/>
+            <a:ext cx="10911535" cy="731520"/>
+          </a:xfrm>
+          <a:prstGeom prst="rect">
+            <a:avLst/>
+          </a:prstGeom>
+          <a:noFill/>
+        </p:spPr>
+        <p:txBody>
+          <a:bodyPr wrap="square">
+            <a:spAutoFit/>
+          </a:bodyPr>
+          <a:lstStyle/>
+          <a:p>
+            <a:pPr algn="ctr"/>
+            <a:r>
+              <a:rPr sz="4800" b="1" i="0">
                 <a:solidFill>
                   <a:srgbClr val="FFFFFF"/>
                 </a:solidFill>
@@ -3793,8 +3793,8 @@
         </p:nvSpPr>
         <p:spPr>
           <a:xfrm>
-            <a:off x="594360" y="2560320"/>
-            <a:ext cx="11002975" cy="384048"/>
+            <a:off x="640080" y="2418588"/>
+            <a:ext cx="10911535" cy="365760"/>
           </a:xfrm>
           <a:prstGeom prst="rect">
             <a:avLst/>
@@ -3811,7 +3811,7 @@
             <a:r>
               <a:rPr sz="2400" b="0" i="1">
                 <a:solidFill>
-                  <a:srgbClr val="B4B4B4"/>
+                  <a:srgbClr val="AAAAAA"/>
                 </a:solidFill>
                 <a:latin typeface="Arial"/>
               </a:rPr>
@@ -3828,8 +3828,78 @@
         </p:nvSpPr>
         <p:spPr>
           <a:xfrm>
-            <a:off x="594360" y="2980944"/>
-            <a:ext cx="11002975" cy="347472"/>
+            <a:off x="640080" y="2985516"/>
+            <a:ext cx="10911535" cy="731520"/>
+          </a:xfrm>
+          <a:prstGeom prst="rect">
+            <a:avLst/>
+          </a:prstGeom>
+          <a:noFill/>
+        </p:spPr>
+        <p:txBody>
+          <a:bodyPr wrap="square">
+            <a:spAutoFit/>
+          </a:bodyPr>
+          <a:lstStyle/>
+          <a:p>
+            <a:pPr algn="ctr"/>
+            <a:r>
+              <a:rPr sz="4800" b="1" i="0">
+                <a:solidFill>
+                  <a:srgbClr val="FFFFFF"/>
+                </a:solidFill>
+                <a:latin typeface="Arial"/>
+              </a:rPr>
+              <a:t>主の力は. 明かされた裏切られない</a:t>
+            </a:r>
+          </a:p>
+        </p:txBody>
+      </p:sp>
+      <p:sp>
+        <p:nvSpPr>
+          <p:cNvPr id="5" name="TextBox 4"/>
+          <p:cNvSpPr txBox="1"/>
+          <p:nvPr/>
+        </p:nvSpPr>
+        <p:spPr>
+          <a:xfrm>
+            <a:off x="640080" y="3753612"/>
+            <a:ext cx="10911535" cy="365760"/>
+          </a:xfrm>
+          <a:prstGeom prst="rect">
+            <a:avLst/>
+          </a:prstGeom>
+          <a:noFill/>
+        </p:spPr>
+        <p:txBody>
+          <a:bodyPr wrap="square">
+            <a:spAutoFit/>
+          </a:bodyPr>
+          <a:lstStyle/>
+          <a:p>
+            <a:pPr algn="ctr"/>
+            <a:r>
+              <a:rPr sz="2400" b="0" i="1">
+                <a:solidFill>
+                  <a:srgbClr val="AAAAAA"/>
+                </a:solidFill>
+                <a:latin typeface="Arial"/>
+              </a:rPr>
+              <a:t>shu no chikara wa akasareta uragirarenai</a:t>
+            </a:r>
+          </a:p>
+        </p:txBody>
+      </p:sp>
+      <p:sp>
+        <p:nvSpPr>
+          <p:cNvPr id="6" name="TextBox 5"/>
+          <p:cNvSpPr txBox="1"/>
+          <p:nvPr/>
+        </p:nvSpPr>
+        <p:spPr>
+          <a:xfrm>
+            <a:off x="640080" y="4530852"/>
+            <a:ext cx="10911535" cy="310896"/>
           </a:xfrm>
           <a:prstGeom prst="rect">
             <a:avLst/>
@@ -3846,81 +3916,11 @@
             <a:r>
               <a:rPr sz="2000" b="0" i="1">
                 <a:solidFill>
-                  <a:srgbClr val="8C8C8C"/>
-                </a:solidFill>
-                <a:latin typeface="Arial"/>
-              </a:rPr>
-              <a:t/>
-            </a:r>
-          </a:p>
-        </p:txBody>
-      </p:sp>
-      <p:sp>
-        <p:nvSpPr>
-          <p:cNvPr id="5" name="TextBox 4"/>
-          <p:cNvSpPr txBox="1"/>
-          <p:nvPr/>
-        </p:nvSpPr>
-        <p:spPr>
-          <a:xfrm>
-            <a:off x="594360" y="3529584"/>
-            <a:ext cx="11002975" cy="685800"/>
-          </a:xfrm>
-          <a:prstGeom prst="rect">
-            <a:avLst/>
-          </a:prstGeom>
-          <a:noFill/>
-        </p:spPr>
-        <p:txBody>
-          <a:bodyPr wrap="square">
-            <a:spAutoFit/>
-          </a:bodyPr>
-          <a:lstStyle/>
-          <a:p>
-            <a:pPr algn="ctr"/>
-            <a:r>
-              <a:rPr sz="4400" b="1" i="0">
-                <a:solidFill>
-                  <a:srgbClr val="FFFFFF"/>
-                </a:solidFill>
-                <a:latin typeface="Arial"/>
-              </a:rPr>
-              <a:t>主の力は. 明かされた裏切られない</a:t>
-            </a:r>
-          </a:p>
-        </p:txBody>
-      </p:sp>
-      <p:sp>
-        <p:nvSpPr>
-          <p:cNvPr id="6" name="TextBox 5"/>
-          <p:cNvSpPr txBox="1"/>
-          <p:nvPr/>
-        </p:nvSpPr>
-        <p:spPr>
-          <a:xfrm>
-            <a:off x="594360" y="4251960"/>
-            <a:ext cx="11002975" cy="384048"/>
-          </a:xfrm>
-          <a:prstGeom prst="rect">
-            <a:avLst/>
-          </a:prstGeom>
-          <a:noFill/>
-        </p:spPr>
-        <p:txBody>
-          <a:bodyPr wrap="square">
-            <a:spAutoFit/>
-          </a:bodyPr>
-          <a:lstStyle/>
-          <a:p>
-            <a:pPr algn="ctr"/>
-            <a:r>
-              <a:rPr sz="2400" b="0" i="1">
-                <a:solidFill>
-                  <a:srgbClr val="B4B4B4"/>
-                </a:solidFill>
-                <a:latin typeface="Arial"/>
-              </a:rPr>
-              <a:t>shu no chikara wa akasareta uragirarenai</a:t>
+                  <a:srgbClr val="828282"/>
+                </a:solidFill>
+                <a:latin typeface="Arial"/>
+              </a:rPr>
+              <a:t>Eu entreguei minha vida aos teus cuidados</a:t>
             </a:r>
           </a:p>
         </p:txBody>
@@ -3933,8 +3933,8 @@
         </p:nvSpPr>
         <p:spPr>
           <a:xfrm>
-            <a:off x="594360" y="4672584"/>
-            <a:ext cx="11002975" cy="347472"/>
+            <a:off x="640080" y="4896612"/>
+            <a:ext cx="10911535" cy="310896"/>
           </a:xfrm>
           <a:prstGeom prst="rect">
             <a:avLst/>
@@ -3951,11 +3951,11 @@
             <a:r>
               <a:rPr sz="2000" b="0" i="1">
                 <a:solidFill>
-                  <a:srgbClr val="8C8C8C"/>
-                </a:solidFill>
-                <a:latin typeface="Arial"/>
-              </a:rPr>
-              <a:t/>
+                  <a:srgbClr val="828282"/>
+                </a:solidFill>
+                <a:latin typeface="Arial"/>
+              </a:rPr>
+              <a:t>Eu aprendi o que significa obedecer</a:t>
             </a:r>
           </a:p>
         </p:txBody>
@@ -3994,23 +3994,23 @@
         </p:nvSpPr>
         <p:spPr>
           <a:xfrm>
-            <a:off x="594360" y="2258568"/>
-            <a:ext cx="11002975" cy="685800"/>
-          </a:xfrm>
-          <a:prstGeom prst="rect">
-            <a:avLst/>
-          </a:prstGeom>
-          <a:noFill/>
-        </p:spPr>
-        <p:txBody>
-          <a:bodyPr wrap="square">
-            <a:spAutoFit/>
-          </a:bodyPr>
-          <a:lstStyle/>
-          <a:p>
-            <a:pPr algn="ctr"/>
-            <a:r>
-              <a:rPr sz="3705" b="1" i="0">
+            <a:off x="640080" y="2052828"/>
+            <a:ext cx="10911535" cy="731520"/>
+          </a:xfrm>
+          <a:prstGeom prst="rect">
+            <a:avLst/>
+          </a:prstGeom>
+          <a:noFill/>
+        </p:spPr>
+        <p:txBody>
+          <a:bodyPr wrap="square">
+            <a:spAutoFit/>
+          </a:bodyPr>
+          <a:lstStyle/>
+          <a:p>
+            <a:pPr algn="ctr"/>
+            <a:r>
+              <a:rPr sz="4000" b="1" i="0">
                 <a:solidFill>
                   <a:srgbClr val="FFFFFF"/>
                 </a:solidFill>
@@ -4029,25 +4029,60 @@
         </p:nvSpPr>
         <p:spPr>
           <a:xfrm>
-            <a:off x="594360" y="2980944"/>
-            <a:ext cx="11002975" cy="347472"/>
-          </a:xfrm>
-          <a:prstGeom prst="rect">
-            <a:avLst/>
-          </a:prstGeom>
-          <a:noFill/>
-        </p:spPr>
-        <p:txBody>
-          <a:bodyPr wrap="square">
-            <a:spAutoFit/>
-          </a:bodyPr>
-          <a:lstStyle/>
-          <a:p>
-            <a:pPr algn="ctr"/>
-            <a:r>
-              <a:rPr sz="2200" b="0" i="1">
-                <a:solidFill>
-                  <a:srgbClr val="8C8C8C"/>
+            <a:off x="640080" y="2985516"/>
+            <a:ext cx="10911535" cy="731520"/>
+          </a:xfrm>
+          <a:prstGeom prst="rect">
+            <a:avLst/>
+          </a:prstGeom>
+          <a:noFill/>
+        </p:spPr>
+        <p:txBody>
+          <a:bodyPr wrap="square">
+            <a:spAutoFit/>
+          </a:bodyPr>
+          <a:lstStyle/>
+          <a:p>
+            <a:pPr algn="ctr"/>
+            <a:r>
+              <a:rPr sz="3300" b="1" i="0">
+                <a:solidFill>
+                  <a:srgbClr val="FFFFFF"/>
+                </a:solidFill>
+                <a:latin typeface="Arial"/>
+              </a:rPr>
+              <a:t>Eu não conseguiria fugir mesmo que eu quizesse</a:t>
+            </a:r>
+          </a:p>
+        </p:txBody>
+      </p:sp>
+      <p:sp>
+        <p:nvSpPr>
+          <p:cNvPr id="4" name="TextBox 3"/>
+          <p:cNvSpPr txBox="1"/>
+          <p:nvPr/>
+        </p:nvSpPr>
+        <p:spPr>
+          <a:xfrm>
+            <a:off x="640080" y="4128516"/>
+            <a:ext cx="10911535" cy="310896"/>
+          </a:xfrm>
+          <a:prstGeom prst="rect">
+            <a:avLst/>
+          </a:prstGeom>
+          <a:noFill/>
+        </p:spPr>
+        <p:txBody>
+          <a:bodyPr wrap="square">
+            <a:spAutoFit/>
+          </a:bodyPr>
+          <a:lstStyle/>
+          <a:p>
+            <a:pPr algn="ctr"/>
+            <a:r>
+              <a:rPr sz="2000" b="0" i="0">
+                <a:solidFill>
+                  <a:srgbClr val="828282"/>
                 </a:solidFill>
                 <a:latin typeface="Arial"/>
               </a:rPr>
@@ -4058,66 +4093,31 @@
       </p:sp>
       <p:sp>
         <p:nvSpPr>
-          <p:cNvPr id="4" name="TextBox 3"/>
-          <p:cNvSpPr txBox="1"/>
-          <p:nvPr/>
-        </p:nvSpPr>
-        <p:spPr>
-          <a:xfrm>
-            <a:off x="594360" y="3529584"/>
-            <a:ext cx="11002975" cy="685800"/>
-          </a:xfrm>
-          <a:prstGeom prst="rect">
-            <a:avLst/>
-          </a:prstGeom>
-          <a:noFill/>
-        </p:spPr>
-        <p:txBody>
-          <a:bodyPr wrap="square">
-            <a:spAutoFit/>
-          </a:bodyPr>
-          <a:lstStyle/>
-          <a:p>
-            <a:pPr algn="ctr"/>
-            <a:r>
-              <a:rPr sz="3060" b="1" i="0">
-                <a:solidFill>
-                  <a:srgbClr val="FFFFFF"/>
-                </a:solidFill>
-                <a:latin typeface="Arial"/>
-              </a:rPr>
-              <a:t>Eu não conseguiria fugir mesmo que eu quizesse</a:t>
-            </a:r>
-          </a:p>
-        </p:txBody>
-      </p:sp>
-      <p:sp>
-        <p:nvSpPr>
           <p:cNvPr id="5" name="TextBox 4"/>
           <p:cNvSpPr txBox="1"/>
           <p:nvPr/>
         </p:nvSpPr>
         <p:spPr>
           <a:xfrm>
-            <a:off x="594360" y="4251960"/>
-            <a:ext cx="11002975" cy="347472"/>
-          </a:xfrm>
-          <a:prstGeom prst="rect">
-            <a:avLst/>
-          </a:prstGeom>
-          <a:noFill/>
-        </p:spPr>
-        <p:txBody>
-          <a:bodyPr wrap="square">
-            <a:spAutoFit/>
-          </a:bodyPr>
-          <a:lstStyle/>
-          <a:p>
-            <a:pPr algn="ctr"/>
-            <a:r>
-              <a:rPr sz="2200" b="0" i="1">
-                <a:solidFill>
-                  <a:srgbClr val="8C8C8C"/>
+            <a:off x="640080" y="4494276"/>
+            <a:ext cx="10911535" cy="310896"/>
+          </a:xfrm>
+          <a:prstGeom prst="rect">
+            <a:avLst/>
+          </a:prstGeom>
+          <a:noFill/>
+        </p:spPr>
+        <p:txBody>
+          <a:bodyPr wrap="square">
+            <a:spAutoFit/>
+          </a:bodyPr>
+          <a:lstStyle/>
+          <a:p>
+            <a:pPr algn="ctr"/>
+            <a:r>
+              <a:rPr sz="2000" b="0" i="0">
+                <a:solidFill>
+                  <a:srgbClr val="828282"/>
                 </a:solidFill>
                 <a:latin typeface="Arial"/>
               </a:rPr>
@@ -4160,23 +4160,23 @@
         </p:nvSpPr>
         <p:spPr>
           <a:xfrm>
-            <a:off x="594360" y="2258568"/>
-            <a:ext cx="11002975" cy="685800"/>
-          </a:xfrm>
-          <a:prstGeom prst="rect">
-            <a:avLst/>
-          </a:prstGeom>
-          <a:noFill/>
-        </p:spPr>
-        <p:txBody>
-          <a:bodyPr wrap="square">
-            <a:spAutoFit/>
-          </a:bodyPr>
-          <a:lstStyle/>
-          <a:p>
-            <a:pPr algn="ctr"/>
-            <a:r>
-              <a:rPr sz="3274" b="1" i="0">
+            <a:off x="640080" y="2052828"/>
+            <a:ext cx="10911535" cy="731520"/>
+          </a:xfrm>
+          <a:prstGeom prst="rect">
+            <a:avLst/>
+          </a:prstGeom>
+          <a:noFill/>
+        </p:spPr>
+        <p:txBody>
+          <a:bodyPr wrap="square">
+            <a:spAutoFit/>
+          </a:bodyPr>
+          <a:lstStyle/>
+          <a:p>
+            <a:pPr algn="ctr"/>
+            <a:r>
+              <a:rPr sz="3500" b="1" i="0">
                 <a:solidFill>
                   <a:srgbClr val="FFFFFF"/>
                 </a:solidFill>
@@ -4195,99 +4195,29 @@
         </p:nvSpPr>
         <p:spPr>
           <a:xfrm>
-            <a:off x="594360" y="2980944"/>
-            <a:ext cx="11002975" cy="347472"/>
-          </a:xfrm>
-          <a:prstGeom prst="rect">
-            <a:avLst/>
-          </a:prstGeom>
-          <a:noFill/>
-        </p:spPr>
-        <p:txBody>
-          <a:bodyPr wrap="square">
-            <a:spAutoFit/>
-          </a:bodyPr>
-          <a:lstStyle/>
-          <a:p>
-            <a:pPr algn="ctr"/>
-            <a:r>
-              <a:rPr sz="2200" b="0" i="1">
-                <a:solidFill>
-                  <a:srgbClr val="8C8C8C"/>
-                </a:solidFill>
-                <a:latin typeface="Arial"/>
-              </a:rPr>
-              <a:t/>
-            </a:r>
-          </a:p>
-        </p:txBody>
-      </p:sp>
-      <p:sp>
-        <p:nvSpPr>
-          <p:cNvPr id="4" name="TextBox 3"/>
-          <p:cNvSpPr txBox="1"/>
-          <p:nvPr/>
-        </p:nvSpPr>
-        <p:spPr>
-          <a:xfrm>
-            <a:off x="594360" y="3529584"/>
-            <a:ext cx="11002975" cy="685800"/>
-          </a:xfrm>
-          <a:prstGeom prst="rect">
-            <a:avLst/>
-          </a:prstGeom>
-          <a:noFill/>
-        </p:spPr>
-        <p:txBody>
-          <a:bodyPr wrap="square">
-            <a:spAutoFit/>
-          </a:bodyPr>
-          <a:lstStyle/>
-          <a:p>
-            <a:pPr algn="ctr"/>
-            <a:r>
-              <a:rPr sz="4400" b="1" i="0">
+            <a:off x="640080" y="2985516"/>
+            <a:ext cx="10911535" cy="731520"/>
+          </a:xfrm>
+          <a:prstGeom prst="rect">
+            <a:avLst/>
+          </a:prstGeom>
+          <a:noFill/>
+        </p:spPr>
+        <p:txBody>
+          <a:bodyPr wrap="square">
+            <a:spAutoFit/>
+          </a:bodyPr>
+          <a:lstStyle/>
+          <a:p>
+            <a:pPr algn="ctr"/>
+            <a:r>
+              <a:rPr sz="4800" b="1" i="0">
                 <a:solidFill>
                   <a:srgbClr val="FFFFFF"/>
                 </a:solidFill>
                 <a:latin typeface="Arial"/>
               </a:rPr>
               <a:t>Agora o sol brilha</a:t>
-            </a:r>
-          </a:p>
-        </p:txBody>
-      </p:sp>
-      <p:sp>
-        <p:nvSpPr>
-          <p:cNvPr id="5" name="TextBox 4"/>
-          <p:cNvSpPr txBox="1"/>
-          <p:nvPr/>
-        </p:nvSpPr>
-        <p:spPr>
-          <a:xfrm>
-            <a:off x="594360" y="4251960"/>
-            <a:ext cx="11002975" cy="347472"/>
-          </a:xfrm>
-          <a:prstGeom prst="rect">
-            <a:avLst/>
-          </a:prstGeom>
-          <a:noFill/>
-        </p:spPr>
-        <p:txBody>
-          <a:bodyPr wrap="square">
-            <a:spAutoFit/>
-          </a:bodyPr>
-          <a:lstStyle/>
-          <a:p>
-            <a:pPr algn="ctr"/>
-            <a:r>
-              <a:rPr sz="2200" b="0" i="1">
-                <a:solidFill>
-                  <a:srgbClr val="8C8C8C"/>
-                </a:solidFill>
-                <a:latin typeface="Arial"/>
-              </a:rPr>
-              <a:t/>
             </a:r>
           </a:p>
         </p:txBody>
@@ -4326,23 +4256,23 @@
         </p:nvSpPr>
         <p:spPr>
           <a:xfrm>
-            <a:off x="594360" y="2258568"/>
-            <a:ext cx="11002975" cy="685800"/>
-          </a:xfrm>
-          <a:prstGeom prst="rect">
-            <a:avLst/>
-          </a:prstGeom>
-          <a:noFill/>
-        </p:spPr>
-        <p:txBody>
-          <a:bodyPr wrap="square">
-            <a:spAutoFit/>
-          </a:bodyPr>
-          <a:lstStyle/>
-          <a:p>
-            <a:pPr algn="ctr"/>
-            <a:r>
-              <a:rPr sz="4400" b="1" i="0">
+            <a:off x="640080" y="2052828"/>
+            <a:ext cx="10911535" cy="731520"/>
+          </a:xfrm>
+          <a:prstGeom prst="rect">
+            <a:avLst/>
+          </a:prstGeom>
+          <a:noFill/>
+        </p:spPr>
+        <p:txBody>
+          <a:bodyPr wrap="square">
+            <a:spAutoFit/>
+          </a:bodyPr>
+          <a:lstStyle/>
+          <a:p>
+            <a:pPr algn="ctr"/>
+            <a:r>
+              <a:rPr sz="4800" b="1" i="0">
                 <a:solidFill>
                   <a:srgbClr val="FFFFFF"/>
                 </a:solidFill>
@@ -4361,25 +4291,60 @@
         </p:nvSpPr>
         <p:spPr>
           <a:xfrm>
-            <a:off x="594360" y="2980944"/>
-            <a:ext cx="11002975" cy="347472"/>
-          </a:xfrm>
-          <a:prstGeom prst="rect">
-            <a:avLst/>
-          </a:prstGeom>
-          <a:noFill/>
-        </p:spPr>
-        <p:txBody>
-          <a:bodyPr wrap="square">
-            <a:spAutoFit/>
-          </a:bodyPr>
-          <a:lstStyle/>
-          <a:p>
-            <a:pPr algn="ctr"/>
-            <a:r>
-              <a:rPr sz="2200" b="0" i="1">
-                <a:solidFill>
-                  <a:srgbClr val="8C8C8C"/>
+            <a:off x="640080" y="2985516"/>
+            <a:ext cx="10911535" cy="731520"/>
+          </a:xfrm>
+          <a:prstGeom prst="rect">
+            <a:avLst/>
+          </a:prstGeom>
+          <a:noFill/>
+        </p:spPr>
+        <p:txBody>
+          <a:bodyPr wrap="square">
+            <a:spAutoFit/>
+          </a:bodyPr>
+          <a:lstStyle/>
+          <a:p>
+            <a:pPr algn="ctr"/>
+            <a:r>
+              <a:rPr sz="3200" b="1" i="0">
+                <a:solidFill>
+                  <a:srgbClr val="FFFFFF"/>
+                </a:solidFill>
+                <a:latin typeface="Arial"/>
+              </a:rPr>
+              <a:t>Pois teu amor é a luz que ilumina os meus passos</a:t>
+            </a:r>
+          </a:p>
+        </p:txBody>
+      </p:sp>
+      <p:sp>
+        <p:nvSpPr>
+          <p:cNvPr id="4" name="TextBox 3"/>
+          <p:cNvSpPr txBox="1"/>
+          <p:nvPr/>
+        </p:nvSpPr>
+        <p:spPr>
+          <a:xfrm>
+            <a:off x="640080" y="4128516"/>
+            <a:ext cx="10911535" cy="310896"/>
+          </a:xfrm>
+          <a:prstGeom prst="rect">
+            <a:avLst/>
+          </a:prstGeom>
+          <a:noFill/>
+        </p:spPr>
+        <p:txBody>
+          <a:bodyPr wrap="square">
+            <a:spAutoFit/>
+          </a:bodyPr>
+          <a:lstStyle/>
+          <a:p>
+            <a:pPr algn="ctr"/>
+            <a:r>
+              <a:rPr sz="2000" b="0" i="0">
+                <a:solidFill>
+                  <a:srgbClr val="828282"/>
                 </a:solidFill>
                 <a:latin typeface="Arial"/>
               </a:rPr>
@@ -4390,66 +4355,31 @@
       </p:sp>
       <p:sp>
         <p:nvSpPr>
-          <p:cNvPr id="4" name="TextBox 3"/>
-          <p:cNvSpPr txBox="1"/>
-          <p:nvPr/>
-        </p:nvSpPr>
-        <p:spPr>
-          <a:xfrm>
-            <a:off x="594360" y="3529584"/>
-            <a:ext cx="11002975" cy="685800"/>
-          </a:xfrm>
-          <a:prstGeom prst="rect">
-            <a:avLst/>
-          </a:prstGeom>
-          <a:noFill/>
-        </p:spPr>
-        <p:txBody>
-          <a:bodyPr wrap="square">
-            <a:spAutoFit/>
-          </a:bodyPr>
-          <a:lstStyle/>
-          <a:p>
-            <a:pPr algn="ctr"/>
-            <a:r>
-              <a:rPr sz="2933" b="1" i="0">
-                <a:solidFill>
-                  <a:srgbClr val="FFFFFF"/>
-                </a:solidFill>
-                <a:latin typeface="Arial"/>
-              </a:rPr>
-              <a:t>Pois teu amor é a luz que ilumina os meus passos</a:t>
-            </a:r>
-          </a:p>
-        </p:txBody>
-      </p:sp>
-      <p:sp>
-        <p:nvSpPr>
           <p:cNvPr id="5" name="TextBox 4"/>
           <p:cNvSpPr txBox="1"/>
           <p:nvPr/>
         </p:nvSpPr>
         <p:spPr>
           <a:xfrm>
-            <a:off x="594360" y="4251960"/>
-            <a:ext cx="11002975" cy="347472"/>
-          </a:xfrm>
-          <a:prstGeom prst="rect">
-            <a:avLst/>
-          </a:prstGeom>
-          <a:noFill/>
-        </p:spPr>
-        <p:txBody>
-          <a:bodyPr wrap="square">
-            <a:spAutoFit/>
-          </a:bodyPr>
-          <a:lstStyle/>
-          <a:p>
-            <a:pPr algn="ctr"/>
-            <a:r>
-              <a:rPr sz="2200" b="0" i="1">
-                <a:solidFill>
-                  <a:srgbClr val="8C8C8C"/>
+            <a:off x="640080" y="4494276"/>
+            <a:ext cx="10911535" cy="310896"/>
+          </a:xfrm>
+          <a:prstGeom prst="rect">
+            <a:avLst/>
+          </a:prstGeom>
+          <a:noFill/>
+        </p:spPr>
+        <p:txBody>
+          <a:bodyPr wrap="square">
+            <a:spAutoFit/>
+          </a:bodyPr>
+          <a:lstStyle/>
+          <a:p>
+            <a:pPr algn="ctr"/>
+            <a:r>
+              <a:rPr sz="2000" b="0" i="0">
+                <a:solidFill>
+                  <a:srgbClr val="828282"/>
                 </a:solidFill>
                 <a:latin typeface="Arial"/>
               </a:rPr>
@@ -4492,23 +4422,23 @@
         </p:nvSpPr>
         <p:spPr>
           <a:xfrm>
-            <a:off x="594360" y="2258568"/>
-            <a:ext cx="11002975" cy="685800"/>
-          </a:xfrm>
-          <a:prstGeom prst="rect">
-            <a:avLst/>
-          </a:prstGeom>
-          <a:noFill/>
-        </p:spPr>
-        <p:txBody>
-          <a:bodyPr wrap="square">
-            <a:spAutoFit/>
-          </a:bodyPr>
-          <a:lstStyle/>
-          <a:p>
-            <a:pPr algn="ctr"/>
-            <a:r>
-              <a:rPr sz="3805" b="1" i="0">
+            <a:off x="640080" y="2052828"/>
+            <a:ext cx="10911535" cy="731520"/>
+          </a:xfrm>
+          <a:prstGeom prst="rect">
+            <a:avLst/>
+          </a:prstGeom>
+          <a:noFill/>
+        </p:spPr>
+        <p:txBody>
+          <a:bodyPr wrap="square">
+            <a:spAutoFit/>
+          </a:bodyPr>
+          <a:lstStyle/>
+          <a:p>
+            <a:pPr algn="ctr"/>
+            <a:r>
+              <a:rPr sz="4100" b="1" i="0">
                 <a:solidFill>
                   <a:srgbClr val="FFFFFF"/>
                 </a:solidFill>
@@ -4527,25 +4457,60 @@
         </p:nvSpPr>
         <p:spPr>
           <a:xfrm>
-            <a:off x="594360" y="2980944"/>
-            <a:ext cx="11002975" cy="347472"/>
-          </a:xfrm>
-          <a:prstGeom prst="rect">
-            <a:avLst/>
-          </a:prstGeom>
-          <a:noFill/>
-        </p:spPr>
-        <p:txBody>
-          <a:bodyPr wrap="square">
-            <a:spAutoFit/>
-          </a:bodyPr>
-          <a:lstStyle/>
-          <a:p>
-            <a:pPr algn="ctr"/>
-            <a:r>
-              <a:rPr sz="2200" b="0" i="1">
-                <a:solidFill>
-                  <a:srgbClr val="8C8C8C"/>
+            <a:off x="640080" y="2985516"/>
+            <a:ext cx="10911535" cy="731520"/>
+          </a:xfrm>
+          <a:prstGeom prst="rect">
+            <a:avLst/>
+          </a:prstGeom>
+          <a:noFill/>
+        </p:spPr>
+        <p:txBody>
+          <a:bodyPr wrap="square">
+            <a:spAutoFit/>
+          </a:bodyPr>
+          <a:lstStyle/>
+          <a:p>
+            <a:pPr algn="ctr"/>
+            <a:r>
+              <a:rPr sz="3200" b="1" i="0">
+                <a:solidFill>
+                  <a:srgbClr val="FFFFFF"/>
+                </a:solidFill>
+                <a:latin typeface="Arial"/>
+              </a:rPr>
+              <a:t>Sua alegria me prende e eu não posso esquecê-la</a:t>
+            </a:r>
+          </a:p>
+        </p:txBody>
+      </p:sp>
+      <p:sp>
+        <p:nvSpPr>
+          <p:cNvPr id="4" name="TextBox 3"/>
+          <p:cNvSpPr txBox="1"/>
+          <p:nvPr/>
+        </p:nvSpPr>
+        <p:spPr>
+          <a:xfrm>
+            <a:off x="640080" y="4128516"/>
+            <a:ext cx="10911535" cy="310896"/>
+          </a:xfrm>
+          <a:prstGeom prst="rect">
+            <a:avLst/>
+          </a:prstGeom>
+          <a:noFill/>
+        </p:spPr>
+        <p:txBody>
+          <a:bodyPr wrap="square">
+            <a:spAutoFit/>
+          </a:bodyPr>
+          <a:lstStyle/>
+          <a:p>
+            <a:pPr algn="ctr"/>
+            <a:r>
+              <a:rPr sz="2000" b="0" i="0">
+                <a:solidFill>
+                  <a:srgbClr val="828282"/>
                 </a:solidFill>
                 <a:latin typeface="Arial"/>
               </a:rPr>
@@ -4556,66 +4521,31 @@
       </p:sp>
       <p:sp>
         <p:nvSpPr>
-          <p:cNvPr id="4" name="TextBox 3"/>
-          <p:cNvSpPr txBox="1"/>
-          <p:nvPr/>
-        </p:nvSpPr>
-        <p:spPr>
-          <a:xfrm>
-            <a:off x="594360" y="3529584"/>
-            <a:ext cx="11002975" cy="685800"/>
-          </a:xfrm>
-          <a:prstGeom prst="rect">
-            <a:avLst/>
-          </a:prstGeom>
-          <a:noFill/>
-        </p:spPr>
-        <p:txBody>
-          <a:bodyPr wrap="square">
-            <a:spAutoFit/>
-          </a:bodyPr>
-          <a:lstStyle/>
-          <a:p>
-            <a:pPr algn="ctr"/>
-            <a:r>
-              <a:rPr sz="2995" b="1" i="0">
-                <a:solidFill>
-                  <a:srgbClr val="FFFFFF"/>
-                </a:solidFill>
-                <a:latin typeface="Arial"/>
-              </a:rPr>
-              <a:t>Sua alegria me prende e eu não posso esquecê-la</a:t>
-            </a:r>
-          </a:p>
-        </p:txBody>
-      </p:sp>
-      <p:sp>
-        <p:nvSpPr>
           <p:cNvPr id="5" name="TextBox 4"/>
           <p:cNvSpPr txBox="1"/>
           <p:nvPr/>
         </p:nvSpPr>
         <p:spPr>
           <a:xfrm>
-            <a:off x="594360" y="4251960"/>
-            <a:ext cx="11002975" cy="347472"/>
-          </a:xfrm>
-          <a:prstGeom prst="rect">
-            <a:avLst/>
-          </a:prstGeom>
-          <a:noFill/>
-        </p:spPr>
-        <p:txBody>
-          <a:bodyPr wrap="square">
-            <a:spAutoFit/>
-          </a:bodyPr>
-          <a:lstStyle/>
-          <a:p>
-            <a:pPr algn="ctr"/>
-            <a:r>
-              <a:rPr sz="2200" b="0" i="1">
-                <a:solidFill>
-                  <a:srgbClr val="8C8C8C"/>
+            <a:off x="640080" y="4494276"/>
+            <a:ext cx="10911535" cy="310896"/>
+          </a:xfrm>
+          <a:prstGeom prst="rect">
+            <a:avLst/>
+          </a:prstGeom>
+          <a:noFill/>
+        </p:spPr>
+        <p:txBody>
+          <a:bodyPr wrap="square">
+            <a:spAutoFit/>
+          </a:bodyPr>
+          <a:lstStyle/>
+          <a:p>
+            <a:pPr algn="ctr"/>
+            <a:r>
+              <a:rPr sz="2000" b="0" i="0">
+                <a:solidFill>
+                  <a:srgbClr val="828282"/>
                 </a:solidFill>
                 <a:latin typeface="Arial"/>
               </a:rPr>
@@ -4658,64 +4588,29 @@
         </p:nvSpPr>
         <p:spPr>
           <a:xfrm>
-            <a:off x="594360" y="2894076"/>
-            <a:ext cx="11002975" cy="685800"/>
-          </a:xfrm>
-          <a:prstGeom prst="rect">
-            <a:avLst/>
-          </a:prstGeom>
-          <a:noFill/>
-        </p:spPr>
-        <p:txBody>
-          <a:bodyPr wrap="square">
-            <a:spAutoFit/>
-          </a:bodyPr>
-          <a:lstStyle/>
-          <a:p>
-            <a:pPr algn="ctr"/>
-            <a:r>
-              <a:rPr sz="4400" b="1" i="0">
+            <a:off x="640080" y="2702052"/>
+            <a:ext cx="10911535" cy="731520"/>
+          </a:xfrm>
+          <a:prstGeom prst="rect">
+            <a:avLst/>
+          </a:prstGeom>
+          <a:noFill/>
+        </p:spPr>
+        <p:txBody>
+          <a:bodyPr wrap="square">
+            <a:spAutoFit/>
+          </a:bodyPr>
+          <a:lstStyle/>
+          <a:p>
+            <a:pPr algn="ctr"/>
+            <a:r>
+              <a:rPr sz="4800" b="1" i="0">
                 <a:solidFill>
                   <a:srgbClr val="FFFFFF"/>
                 </a:solidFill>
                 <a:latin typeface="Arial"/>
               </a:rPr>
               <a:t>Eu não posso esquecê-la</a:t>
-            </a:r>
-          </a:p>
-        </p:txBody>
-      </p:sp>
-      <p:sp>
-        <p:nvSpPr>
-          <p:cNvPr id="3" name="TextBox 2"/>
-          <p:cNvSpPr txBox="1"/>
-          <p:nvPr/>
-        </p:nvSpPr>
-        <p:spPr>
-          <a:xfrm>
-            <a:off x="594360" y="3616452"/>
-            <a:ext cx="11002975" cy="347472"/>
-          </a:xfrm>
-          <a:prstGeom prst="rect">
-            <a:avLst/>
-          </a:prstGeom>
-          <a:noFill/>
-        </p:spPr>
-        <p:txBody>
-          <a:bodyPr wrap="square">
-            <a:spAutoFit/>
-          </a:bodyPr>
-          <a:lstStyle/>
-          <a:p>
-            <a:pPr algn="ctr"/>
-            <a:r>
-              <a:rPr sz="2200" b="0" i="1">
-                <a:solidFill>
-                  <a:srgbClr val="8C8C8C"/>
-                </a:solidFill>
-                <a:latin typeface="Arial"/>
-              </a:rPr>
-              <a:t/>
             </a:r>
           </a:p>
         </p:txBody>
@@ -4754,23 +4649,23 @@
         </p:nvSpPr>
         <p:spPr>
           <a:xfrm>
-            <a:off x="594360" y="2258568"/>
-            <a:ext cx="11002975" cy="685800"/>
-          </a:xfrm>
-          <a:prstGeom prst="rect">
-            <a:avLst/>
-          </a:prstGeom>
-          <a:noFill/>
-        </p:spPr>
-        <p:txBody>
-          <a:bodyPr wrap="square">
-            <a:spAutoFit/>
-          </a:bodyPr>
-          <a:lstStyle/>
-          <a:p>
-            <a:pPr algn="ctr"/>
-            <a:r>
-              <a:rPr sz="3911" b="1" i="0">
+            <a:off x="640080" y="2052828"/>
+            <a:ext cx="10911535" cy="731520"/>
+          </a:xfrm>
+          <a:prstGeom prst="rect">
+            <a:avLst/>
+          </a:prstGeom>
+          <a:noFill/>
+        </p:spPr>
+        <p:txBody>
+          <a:bodyPr wrap="square">
+            <a:spAutoFit/>
+          </a:bodyPr>
+          <a:lstStyle/>
+          <a:p>
+            <a:pPr algn="ctr"/>
+            <a:r>
+              <a:rPr sz="4200" b="1" i="0">
                 <a:solidFill>
                   <a:srgbClr val="FFFFFF"/>
                 </a:solidFill>
@@ -4789,99 +4684,29 @@
         </p:nvSpPr>
         <p:spPr>
           <a:xfrm>
-            <a:off x="594360" y="2980944"/>
-            <a:ext cx="11002975" cy="347472"/>
-          </a:xfrm>
-          <a:prstGeom prst="rect">
-            <a:avLst/>
-          </a:prstGeom>
-          <a:noFill/>
-        </p:spPr>
-        <p:txBody>
-          <a:bodyPr wrap="square">
-            <a:spAutoFit/>
-          </a:bodyPr>
-          <a:lstStyle/>
-          <a:p>
-            <a:pPr algn="ctr"/>
-            <a:r>
-              <a:rPr sz="2200" b="0" i="1">
-                <a:solidFill>
-                  <a:srgbClr val="8C8C8C"/>
-                </a:solidFill>
-                <a:latin typeface="Arial"/>
-              </a:rPr>
-              <a:t/>
-            </a:r>
-          </a:p>
-        </p:txBody>
-      </p:sp>
-      <p:sp>
-        <p:nvSpPr>
-          <p:cNvPr id="4" name="TextBox 3"/>
-          <p:cNvSpPr txBox="1"/>
-          <p:nvPr/>
-        </p:nvSpPr>
-        <p:spPr>
-          <a:xfrm>
-            <a:off x="594360" y="3529584"/>
-            <a:ext cx="11002975" cy="685800"/>
-          </a:xfrm>
-          <a:prstGeom prst="rect">
-            <a:avLst/>
-          </a:prstGeom>
-          <a:noFill/>
-        </p:spPr>
-        <p:txBody>
-          <a:bodyPr wrap="square">
-            <a:spAutoFit/>
-          </a:bodyPr>
-          <a:lstStyle/>
-          <a:p>
-            <a:pPr algn="ctr"/>
-            <a:r>
-              <a:rPr sz="3520" b="1" i="0">
+            <a:off x="640080" y="2985516"/>
+            <a:ext cx="10911535" cy="731520"/>
+          </a:xfrm>
+          <a:prstGeom prst="rect">
+            <a:avLst/>
+          </a:prstGeom>
+          <a:noFill/>
+        </p:spPr>
+        <p:txBody>
+          <a:bodyPr wrap="square">
+            <a:spAutoFit/>
+          </a:bodyPr>
+          <a:lstStyle/>
+          <a:p>
+            <a:pPr algn="ctr"/>
+            <a:r>
+              <a:rPr sz="3800" b="1" i="0">
                 <a:solidFill>
                   <a:srgbClr val="FFFFFF"/>
                 </a:solidFill>
                 <a:latin typeface="Arial"/>
               </a:rPr>
               <a:t>Estou andando no caminho que Tu fizestes</a:t>
-            </a:r>
-          </a:p>
-        </p:txBody>
-      </p:sp>
-      <p:sp>
-        <p:nvSpPr>
-          <p:cNvPr id="5" name="TextBox 4"/>
-          <p:cNvSpPr txBox="1"/>
-          <p:nvPr/>
-        </p:nvSpPr>
-        <p:spPr>
-          <a:xfrm>
-            <a:off x="594360" y="4251960"/>
-            <a:ext cx="11002975" cy="347472"/>
-          </a:xfrm>
-          <a:prstGeom prst="rect">
-            <a:avLst/>
-          </a:prstGeom>
-          <a:noFill/>
-        </p:spPr>
-        <p:txBody>
-          <a:bodyPr wrap="square">
-            <a:spAutoFit/>
-          </a:bodyPr>
-          <a:lstStyle/>
-          <a:p>
-            <a:pPr algn="ctr"/>
-            <a:r>
-              <a:rPr sz="2200" b="0" i="1">
-                <a:solidFill>
-                  <a:srgbClr val="8C8C8C"/>
-                </a:solidFill>
-                <a:latin typeface="Arial"/>
-              </a:rPr>
-              <a:t/>
             </a:r>
           </a:p>
         </p:txBody>
@@ -4920,23 +4745,23 @@
         </p:nvSpPr>
         <p:spPr>
           <a:xfrm>
-            <a:off x="594360" y="2258568"/>
-            <a:ext cx="11002975" cy="685800"/>
-          </a:xfrm>
-          <a:prstGeom prst="rect">
-            <a:avLst/>
-          </a:prstGeom>
-          <a:noFill/>
-        </p:spPr>
-        <p:txBody>
-          <a:bodyPr wrap="square">
-            <a:spAutoFit/>
-          </a:bodyPr>
-          <a:lstStyle/>
-          <a:p>
-            <a:pPr algn="ctr"/>
-            <a:r>
-              <a:rPr sz="3705" b="1" i="0">
+            <a:off x="640080" y="2052828"/>
+            <a:ext cx="10911535" cy="731520"/>
+          </a:xfrm>
+          <a:prstGeom prst="rect">
+            <a:avLst/>
+          </a:prstGeom>
+          <a:noFill/>
+        </p:spPr>
+        <p:txBody>
+          <a:bodyPr wrap="square">
+            <a:spAutoFit/>
+          </a:bodyPr>
+          <a:lstStyle/>
+          <a:p>
+            <a:pPr algn="ctr"/>
+            <a:r>
+              <a:rPr sz="4000" b="1" i="0">
                 <a:solidFill>
                   <a:srgbClr val="FFFFFF"/>
                 </a:solidFill>
@@ -4955,25 +4780,60 @@
         </p:nvSpPr>
         <p:spPr>
           <a:xfrm>
-            <a:off x="594360" y="2980944"/>
-            <a:ext cx="11002975" cy="347472"/>
-          </a:xfrm>
-          <a:prstGeom prst="rect">
-            <a:avLst/>
-          </a:prstGeom>
-          <a:noFill/>
-        </p:spPr>
-        <p:txBody>
-          <a:bodyPr wrap="square">
-            <a:spAutoFit/>
-          </a:bodyPr>
-          <a:lstStyle/>
-          <a:p>
-            <a:pPr algn="ctr"/>
-            <a:r>
-              <a:rPr sz="2200" b="0" i="1">
-                <a:solidFill>
-                  <a:srgbClr val="8C8C8C"/>
+            <a:off x="640080" y="2985516"/>
+            <a:ext cx="10911535" cy="731520"/>
+          </a:xfrm>
+          <a:prstGeom prst="rect">
+            <a:avLst/>
+          </a:prstGeom>
+          <a:noFill/>
+        </p:spPr>
+        <p:txBody>
+          <a:bodyPr wrap="square">
+            <a:spAutoFit/>
+          </a:bodyPr>
+          <a:lstStyle/>
+          <a:p>
+            <a:pPr algn="ctr"/>
+            <a:r>
+              <a:rPr sz="3300" b="1" i="0">
+                <a:solidFill>
+                  <a:srgbClr val="FFFFFF"/>
+                </a:solidFill>
+                <a:latin typeface="Arial"/>
+              </a:rPr>
+              <a:t>Eu não conseguiria fugir mesmo que eu quizesse</a:t>
+            </a:r>
+          </a:p>
+        </p:txBody>
+      </p:sp>
+      <p:sp>
+        <p:nvSpPr>
+          <p:cNvPr id="4" name="TextBox 3"/>
+          <p:cNvSpPr txBox="1"/>
+          <p:nvPr/>
+        </p:nvSpPr>
+        <p:spPr>
+          <a:xfrm>
+            <a:off x="640080" y="4128516"/>
+            <a:ext cx="10911535" cy="310896"/>
+          </a:xfrm>
+          <a:prstGeom prst="rect">
+            <a:avLst/>
+          </a:prstGeom>
+          <a:noFill/>
+        </p:spPr>
+        <p:txBody>
+          <a:bodyPr wrap="square">
+            <a:spAutoFit/>
+          </a:bodyPr>
+          <a:lstStyle/>
+          <a:p>
+            <a:pPr algn="ctr"/>
+            <a:r>
+              <a:rPr sz="2000" b="0" i="0">
+                <a:solidFill>
+                  <a:srgbClr val="828282"/>
                 </a:solidFill>
                 <a:latin typeface="Arial"/>
               </a:rPr>
@@ -4984,66 +4844,31 @@
       </p:sp>
       <p:sp>
         <p:nvSpPr>
-          <p:cNvPr id="4" name="TextBox 3"/>
-          <p:cNvSpPr txBox="1"/>
-          <p:nvPr/>
-        </p:nvSpPr>
-        <p:spPr>
-          <a:xfrm>
-            <a:off x="594360" y="3529584"/>
-            <a:ext cx="11002975" cy="685800"/>
-          </a:xfrm>
-          <a:prstGeom prst="rect">
-            <a:avLst/>
-          </a:prstGeom>
-          <a:noFill/>
-        </p:spPr>
-        <p:txBody>
-          <a:bodyPr wrap="square">
-            <a:spAutoFit/>
-          </a:bodyPr>
-          <a:lstStyle/>
-          <a:p>
-            <a:pPr algn="ctr"/>
-            <a:r>
-              <a:rPr sz="3060" b="1" i="0">
-                <a:solidFill>
-                  <a:srgbClr val="FFFFFF"/>
-                </a:solidFill>
-                <a:latin typeface="Arial"/>
-              </a:rPr>
-              <a:t>Eu não conseguiria fugir mesmo que eu quizesse</a:t>
-            </a:r>
-          </a:p>
-        </p:txBody>
-      </p:sp>
-      <p:sp>
-        <p:nvSpPr>
           <p:cNvPr id="5" name="TextBox 4"/>
           <p:cNvSpPr txBox="1"/>
           <p:nvPr/>
         </p:nvSpPr>
         <p:spPr>
           <a:xfrm>
-            <a:off x="594360" y="4251960"/>
-            <a:ext cx="11002975" cy="347472"/>
-          </a:xfrm>
-          <a:prstGeom prst="rect">
-            <a:avLst/>
-          </a:prstGeom>
-          <a:noFill/>
-        </p:spPr>
-        <p:txBody>
-          <a:bodyPr wrap="square">
-            <a:spAutoFit/>
-          </a:bodyPr>
-          <a:lstStyle/>
-          <a:p>
-            <a:pPr algn="ctr"/>
-            <a:r>
-              <a:rPr sz="2200" b="0" i="1">
-                <a:solidFill>
-                  <a:srgbClr val="8C8C8C"/>
+            <a:off x="640080" y="4494276"/>
+            <a:ext cx="10911535" cy="310896"/>
+          </a:xfrm>
+          <a:prstGeom prst="rect">
+            <a:avLst/>
+          </a:prstGeom>
+          <a:noFill/>
+        </p:spPr>
+        <p:txBody>
+          <a:bodyPr wrap="square">
+            <a:spAutoFit/>
+          </a:bodyPr>
+          <a:lstStyle/>
+          <a:p>
+            <a:pPr algn="ctr"/>
+            <a:r>
+              <a:rPr sz="2000" b="0" i="0">
+                <a:solidFill>
+                  <a:srgbClr val="828282"/>
                 </a:solidFill>
                 <a:latin typeface="Arial"/>
               </a:rPr>
@@ -5086,23 +4911,23 @@
         </p:nvSpPr>
         <p:spPr>
           <a:xfrm>
-            <a:off x="594360" y="2258568"/>
-            <a:ext cx="11002975" cy="685800"/>
-          </a:xfrm>
-          <a:prstGeom prst="rect">
-            <a:avLst/>
-          </a:prstGeom>
-          <a:noFill/>
-        </p:spPr>
-        <p:txBody>
-          <a:bodyPr wrap="square">
-            <a:spAutoFit/>
-          </a:bodyPr>
-          <a:lstStyle/>
-          <a:p>
-            <a:pPr algn="ctr"/>
-            <a:r>
-              <a:rPr sz="3274" b="1" i="0">
+            <a:off x="640080" y="2052828"/>
+            <a:ext cx="10911535" cy="731520"/>
+          </a:xfrm>
+          <a:prstGeom prst="rect">
+            <a:avLst/>
+          </a:prstGeom>
+          <a:noFill/>
+        </p:spPr>
+        <p:txBody>
+          <a:bodyPr wrap="square">
+            <a:spAutoFit/>
+          </a:bodyPr>
+          <a:lstStyle/>
+          <a:p>
+            <a:pPr algn="ctr"/>
+            <a:r>
+              <a:rPr sz="3500" b="1" i="0">
                 <a:solidFill>
                   <a:srgbClr val="FFFFFF"/>
                 </a:solidFill>
@@ -5121,99 +4946,29 @@
         </p:nvSpPr>
         <p:spPr>
           <a:xfrm>
-            <a:off x="594360" y="2980944"/>
-            <a:ext cx="11002975" cy="347472"/>
-          </a:xfrm>
-          <a:prstGeom prst="rect">
-            <a:avLst/>
-          </a:prstGeom>
-          <a:noFill/>
-        </p:spPr>
-        <p:txBody>
-          <a:bodyPr wrap="square">
-            <a:spAutoFit/>
-          </a:bodyPr>
-          <a:lstStyle/>
-          <a:p>
-            <a:pPr algn="ctr"/>
-            <a:r>
-              <a:rPr sz="2200" b="0" i="1">
-                <a:solidFill>
-                  <a:srgbClr val="8C8C8C"/>
-                </a:solidFill>
-                <a:latin typeface="Arial"/>
-              </a:rPr>
-              <a:t/>
-            </a:r>
-          </a:p>
-        </p:txBody>
-      </p:sp>
-      <p:sp>
-        <p:nvSpPr>
-          <p:cNvPr id="4" name="TextBox 3"/>
-          <p:cNvSpPr txBox="1"/>
-          <p:nvPr/>
-        </p:nvSpPr>
-        <p:spPr>
-          <a:xfrm>
-            <a:off x="594360" y="3529584"/>
-            <a:ext cx="11002975" cy="685800"/>
-          </a:xfrm>
-          <a:prstGeom prst="rect">
-            <a:avLst/>
-          </a:prstGeom>
-          <a:noFill/>
-        </p:spPr>
-        <p:txBody>
-          <a:bodyPr wrap="square">
-            <a:spAutoFit/>
-          </a:bodyPr>
-          <a:lstStyle/>
-          <a:p>
-            <a:pPr algn="ctr"/>
-            <a:r>
-              <a:rPr sz="4400" b="1" i="0">
+            <a:off x="640080" y="2985516"/>
+            <a:ext cx="10911535" cy="731520"/>
+          </a:xfrm>
+          <a:prstGeom prst="rect">
+            <a:avLst/>
+          </a:prstGeom>
+          <a:noFill/>
+        </p:spPr>
+        <p:txBody>
+          <a:bodyPr wrap="square">
+            <a:spAutoFit/>
+          </a:bodyPr>
+          <a:lstStyle/>
+          <a:p>
+            <a:pPr algn="ctr"/>
+            <a:r>
+              <a:rPr sz="4800" b="1" i="0">
                 <a:solidFill>
                   <a:srgbClr val="FFFFFF"/>
                 </a:solidFill>
                 <a:latin typeface="Arial"/>
               </a:rPr>
               <a:t>Agora o sol brilha</a:t>
-            </a:r>
-          </a:p>
-        </p:txBody>
-      </p:sp>
-      <p:sp>
-        <p:nvSpPr>
-          <p:cNvPr id="5" name="TextBox 4"/>
-          <p:cNvSpPr txBox="1"/>
-          <p:nvPr/>
-        </p:nvSpPr>
-        <p:spPr>
-          <a:xfrm>
-            <a:off x="594360" y="4251960"/>
-            <a:ext cx="11002975" cy="347472"/>
-          </a:xfrm>
-          <a:prstGeom prst="rect">
-            <a:avLst/>
-          </a:prstGeom>
-          <a:noFill/>
-        </p:spPr>
-        <p:txBody>
-          <a:bodyPr wrap="square">
-            <a:spAutoFit/>
-          </a:bodyPr>
-          <a:lstStyle/>
-          <a:p>
-            <a:pPr algn="ctr"/>
-            <a:r>
-              <a:rPr sz="2200" b="0" i="1">
-                <a:solidFill>
-                  <a:srgbClr val="8C8C8C"/>
-                </a:solidFill>
-                <a:latin typeface="Arial"/>
-              </a:rPr>
-              <a:t/>
             </a:r>
           </a:p>
         </p:txBody>
@@ -5252,23 +5007,23 @@
         </p:nvSpPr>
         <p:spPr>
           <a:xfrm>
-            <a:off x="594360" y="2258568"/>
-            <a:ext cx="11002975" cy="685800"/>
-          </a:xfrm>
-          <a:prstGeom prst="rect">
-            <a:avLst/>
-          </a:prstGeom>
-          <a:noFill/>
-        </p:spPr>
-        <p:txBody>
-          <a:bodyPr wrap="square">
-            <a:spAutoFit/>
-          </a:bodyPr>
-          <a:lstStyle/>
-          <a:p>
-            <a:pPr algn="ctr"/>
-            <a:r>
-              <a:rPr sz="4400" b="1" i="0">
+            <a:off x="640080" y="2052828"/>
+            <a:ext cx="10911535" cy="731520"/>
+          </a:xfrm>
+          <a:prstGeom prst="rect">
+            <a:avLst/>
+          </a:prstGeom>
+          <a:noFill/>
+        </p:spPr>
+        <p:txBody>
+          <a:bodyPr wrap="square">
+            <a:spAutoFit/>
+          </a:bodyPr>
+          <a:lstStyle/>
+          <a:p>
+            <a:pPr algn="ctr"/>
+            <a:r>
+              <a:rPr sz="4800" b="1" i="0">
                 <a:solidFill>
                   <a:srgbClr val="FFFFFF"/>
                 </a:solidFill>
@@ -5287,25 +5042,60 @@
         </p:nvSpPr>
         <p:spPr>
           <a:xfrm>
-            <a:off x="594360" y="2980944"/>
-            <a:ext cx="11002975" cy="347472"/>
-          </a:xfrm>
-          <a:prstGeom prst="rect">
-            <a:avLst/>
-          </a:prstGeom>
-          <a:noFill/>
-        </p:spPr>
-        <p:txBody>
-          <a:bodyPr wrap="square">
-            <a:spAutoFit/>
-          </a:bodyPr>
-          <a:lstStyle/>
-          <a:p>
-            <a:pPr algn="ctr"/>
-            <a:r>
-              <a:rPr sz="2200" b="0" i="1">
-                <a:solidFill>
-                  <a:srgbClr val="8C8C8C"/>
+            <a:off x="640080" y="2985516"/>
+            <a:ext cx="10911535" cy="731520"/>
+          </a:xfrm>
+          <a:prstGeom prst="rect">
+            <a:avLst/>
+          </a:prstGeom>
+          <a:noFill/>
+        </p:spPr>
+        <p:txBody>
+          <a:bodyPr wrap="square">
+            <a:spAutoFit/>
+          </a:bodyPr>
+          <a:lstStyle/>
+          <a:p>
+            <a:pPr algn="ctr"/>
+            <a:r>
+              <a:rPr sz="3200" b="1" i="0">
+                <a:solidFill>
+                  <a:srgbClr val="FFFFFF"/>
+                </a:solidFill>
+                <a:latin typeface="Arial"/>
+              </a:rPr>
+              <a:t>Pois teu amor é a luz que ilumina os meus passos</a:t>
+            </a:r>
+          </a:p>
+        </p:txBody>
+      </p:sp>
+      <p:sp>
+        <p:nvSpPr>
+          <p:cNvPr id="4" name="TextBox 3"/>
+          <p:cNvSpPr txBox="1"/>
+          <p:nvPr/>
+        </p:nvSpPr>
+        <p:spPr>
+          <a:xfrm>
+            <a:off x="640080" y="4128516"/>
+            <a:ext cx="10911535" cy="310896"/>
+          </a:xfrm>
+          <a:prstGeom prst="rect">
+            <a:avLst/>
+          </a:prstGeom>
+          <a:noFill/>
+        </p:spPr>
+        <p:txBody>
+          <a:bodyPr wrap="square">
+            <a:spAutoFit/>
+          </a:bodyPr>
+          <a:lstStyle/>
+          <a:p>
+            <a:pPr algn="ctr"/>
+            <a:r>
+              <a:rPr sz="2000" b="0" i="0">
+                <a:solidFill>
+                  <a:srgbClr val="828282"/>
                 </a:solidFill>
                 <a:latin typeface="Arial"/>
               </a:rPr>
@@ -5316,66 +5106,31 @@
       </p:sp>
       <p:sp>
         <p:nvSpPr>
-          <p:cNvPr id="4" name="TextBox 3"/>
-          <p:cNvSpPr txBox="1"/>
-          <p:nvPr/>
-        </p:nvSpPr>
-        <p:spPr>
-          <a:xfrm>
-            <a:off x="594360" y="3529584"/>
-            <a:ext cx="11002975" cy="685800"/>
-          </a:xfrm>
-          <a:prstGeom prst="rect">
-            <a:avLst/>
-          </a:prstGeom>
-          <a:noFill/>
-        </p:spPr>
-        <p:txBody>
-          <a:bodyPr wrap="square">
-            <a:spAutoFit/>
-          </a:bodyPr>
-          <a:lstStyle/>
-          <a:p>
-            <a:pPr algn="ctr"/>
-            <a:r>
-              <a:rPr sz="2933" b="1" i="0">
-                <a:solidFill>
-                  <a:srgbClr val="FFFFFF"/>
-                </a:solidFill>
-                <a:latin typeface="Arial"/>
-              </a:rPr>
-              <a:t>Pois teu amor é a luz que ilumina os meus passos</a:t>
-            </a:r>
-          </a:p>
-        </p:txBody>
-      </p:sp>
-      <p:sp>
-        <p:nvSpPr>
           <p:cNvPr id="5" name="TextBox 4"/>
           <p:cNvSpPr txBox="1"/>
           <p:nvPr/>
         </p:nvSpPr>
         <p:spPr>
           <a:xfrm>
-            <a:off x="594360" y="4251960"/>
-            <a:ext cx="11002975" cy="347472"/>
-          </a:xfrm>
-          <a:prstGeom prst="rect">
-            <a:avLst/>
-          </a:prstGeom>
-          <a:noFill/>
-        </p:spPr>
-        <p:txBody>
-          <a:bodyPr wrap="square">
-            <a:spAutoFit/>
-          </a:bodyPr>
-          <a:lstStyle/>
-          <a:p>
-            <a:pPr algn="ctr"/>
-            <a:r>
-              <a:rPr sz="2200" b="0" i="1">
-                <a:solidFill>
-                  <a:srgbClr val="8C8C8C"/>
+            <a:off x="640080" y="4494276"/>
+            <a:ext cx="10911535" cy="310896"/>
+          </a:xfrm>
+          <a:prstGeom prst="rect">
+            <a:avLst/>
+          </a:prstGeom>
+          <a:noFill/>
+        </p:spPr>
+        <p:txBody>
+          <a:bodyPr wrap="square">
+            <a:spAutoFit/>
+          </a:bodyPr>
+          <a:lstStyle/>
+          <a:p>
+            <a:pPr algn="ctr"/>
+            <a:r>
+              <a:rPr sz="2000" b="0" i="0">
+                <a:solidFill>
+                  <a:srgbClr val="828282"/>
                 </a:solidFill>
                 <a:latin typeface="Arial"/>
               </a:rPr>
@@ -5418,23 +5173,23 @@
         </p:nvSpPr>
         <p:spPr>
           <a:xfrm>
-            <a:off x="594360" y="2258568"/>
-            <a:ext cx="11002975" cy="685800"/>
-          </a:xfrm>
-          <a:prstGeom prst="rect">
-            <a:avLst/>
-          </a:prstGeom>
-          <a:noFill/>
-        </p:spPr>
-        <p:txBody>
-          <a:bodyPr wrap="square">
-            <a:spAutoFit/>
-          </a:bodyPr>
-          <a:lstStyle/>
-          <a:p>
-            <a:pPr algn="ctr"/>
-            <a:r>
-              <a:rPr sz="3805" b="1" i="0">
+            <a:off x="640080" y="2052828"/>
+            <a:ext cx="10911535" cy="731520"/>
+          </a:xfrm>
+          <a:prstGeom prst="rect">
+            <a:avLst/>
+          </a:prstGeom>
+          <a:noFill/>
+        </p:spPr>
+        <p:txBody>
+          <a:bodyPr wrap="square">
+            <a:spAutoFit/>
+          </a:bodyPr>
+          <a:lstStyle/>
+          <a:p>
+            <a:pPr algn="ctr"/>
+            <a:r>
+              <a:rPr sz="4100" b="1" i="0">
                 <a:solidFill>
                   <a:srgbClr val="FFFFFF"/>
                 </a:solidFill>
@@ -5453,25 +5208,60 @@
         </p:nvSpPr>
         <p:spPr>
           <a:xfrm>
-            <a:off x="594360" y="2980944"/>
-            <a:ext cx="11002975" cy="347472"/>
-          </a:xfrm>
-          <a:prstGeom prst="rect">
-            <a:avLst/>
-          </a:prstGeom>
-          <a:noFill/>
-        </p:spPr>
-        <p:txBody>
-          <a:bodyPr wrap="square">
-            <a:spAutoFit/>
-          </a:bodyPr>
-          <a:lstStyle/>
-          <a:p>
-            <a:pPr algn="ctr"/>
-            <a:r>
-              <a:rPr sz="2200" b="0" i="1">
-                <a:solidFill>
-                  <a:srgbClr val="8C8C8C"/>
+            <a:off x="640080" y="2985516"/>
+            <a:ext cx="10911535" cy="731520"/>
+          </a:xfrm>
+          <a:prstGeom prst="rect">
+            <a:avLst/>
+          </a:prstGeom>
+          <a:noFill/>
+        </p:spPr>
+        <p:txBody>
+          <a:bodyPr wrap="square">
+            <a:spAutoFit/>
+          </a:bodyPr>
+          <a:lstStyle/>
+          <a:p>
+            <a:pPr algn="ctr"/>
+            <a:r>
+              <a:rPr sz="3200" b="1" i="0">
+                <a:solidFill>
+                  <a:srgbClr val="FFFFFF"/>
+                </a:solidFill>
+                <a:latin typeface="Arial"/>
+              </a:rPr>
+              <a:t>Sua alegria me prende e eu não posso esquecê-la</a:t>
+            </a:r>
+          </a:p>
+        </p:txBody>
+      </p:sp>
+      <p:sp>
+        <p:nvSpPr>
+          <p:cNvPr id="4" name="TextBox 3"/>
+          <p:cNvSpPr txBox="1"/>
+          <p:nvPr/>
+        </p:nvSpPr>
+        <p:spPr>
+          <a:xfrm>
+            <a:off x="640080" y="4128516"/>
+            <a:ext cx="10911535" cy="310896"/>
+          </a:xfrm>
+          <a:prstGeom prst="rect">
+            <a:avLst/>
+          </a:prstGeom>
+          <a:noFill/>
+        </p:spPr>
+        <p:txBody>
+          <a:bodyPr wrap="square">
+            <a:spAutoFit/>
+          </a:bodyPr>
+          <a:lstStyle/>
+          <a:p>
+            <a:pPr algn="ctr"/>
+            <a:r>
+              <a:rPr sz="2000" b="0" i="0">
+                <a:solidFill>
+                  <a:srgbClr val="828282"/>
                 </a:solidFill>
                 <a:latin typeface="Arial"/>
               </a:rPr>
@@ -5482,66 +5272,31 @@
       </p:sp>
       <p:sp>
         <p:nvSpPr>
-          <p:cNvPr id="4" name="TextBox 3"/>
-          <p:cNvSpPr txBox="1"/>
-          <p:nvPr/>
-        </p:nvSpPr>
-        <p:spPr>
-          <a:xfrm>
-            <a:off x="594360" y="3529584"/>
-            <a:ext cx="11002975" cy="685800"/>
-          </a:xfrm>
-          <a:prstGeom prst="rect">
-            <a:avLst/>
-          </a:prstGeom>
-          <a:noFill/>
-        </p:spPr>
-        <p:txBody>
-          <a:bodyPr wrap="square">
-            <a:spAutoFit/>
-          </a:bodyPr>
-          <a:lstStyle/>
-          <a:p>
-            <a:pPr algn="ctr"/>
-            <a:r>
-              <a:rPr sz="2995" b="1" i="0">
-                <a:solidFill>
-                  <a:srgbClr val="FFFFFF"/>
-                </a:solidFill>
-                <a:latin typeface="Arial"/>
-              </a:rPr>
-              <a:t>Sua alegria me prende e eu não posso esquecê-la</a:t>
-            </a:r>
-          </a:p>
-        </p:txBody>
-      </p:sp>
-      <p:sp>
-        <p:nvSpPr>
           <p:cNvPr id="5" name="TextBox 4"/>
           <p:cNvSpPr txBox="1"/>
           <p:nvPr/>
         </p:nvSpPr>
         <p:spPr>
           <a:xfrm>
-            <a:off x="594360" y="4251960"/>
-            <a:ext cx="11002975" cy="347472"/>
-          </a:xfrm>
-          <a:prstGeom prst="rect">
-            <a:avLst/>
-          </a:prstGeom>
-          <a:noFill/>
-        </p:spPr>
-        <p:txBody>
-          <a:bodyPr wrap="square">
-            <a:spAutoFit/>
-          </a:bodyPr>
-          <a:lstStyle/>
-          <a:p>
-            <a:pPr algn="ctr"/>
-            <a:r>
-              <a:rPr sz="2200" b="0" i="1">
-                <a:solidFill>
-                  <a:srgbClr val="8C8C8C"/>
+            <a:off x="640080" y="4494276"/>
+            <a:ext cx="10911535" cy="310896"/>
+          </a:xfrm>
+          <a:prstGeom prst="rect">
+            <a:avLst/>
+          </a:prstGeom>
+          <a:noFill/>
+        </p:spPr>
+        <p:txBody>
+          <a:bodyPr wrap="square">
+            <a:spAutoFit/>
+          </a:bodyPr>
+          <a:lstStyle/>
+          <a:p>
+            <a:pPr algn="ctr"/>
+            <a:r>
+              <a:rPr sz="2000" b="0" i="0">
+                <a:solidFill>
+                  <a:srgbClr val="828282"/>
                 </a:solidFill>
                 <a:latin typeface="Arial"/>
               </a:rPr>
@@ -5584,64 +5339,29 @@
         </p:nvSpPr>
         <p:spPr>
           <a:xfrm>
-            <a:off x="594360" y="2894076"/>
-            <a:ext cx="11002975" cy="685800"/>
-          </a:xfrm>
-          <a:prstGeom prst="rect">
-            <a:avLst/>
-          </a:prstGeom>
-          <a:noFill/>
-        </p:spPr>
-        <p:txBody>
-          <a:bodyPr wrap="square">
-            <a:spAutoFit/>
-          </a:bodyPr>
-          <a:lstStyle/>
-          <a:p>
-            <a:pPr algn="ctr"/>
-            <a:r>
-              <a:rPr sz="4400" b="1" i="0">
+            <a:off x="640080" y="2702052"/>
+            <a:ext cx="10911535" cy="731520"/>
+          </a:xfrm>
+          <a:prstGeom prst="rect">
+            <a:avLst/>
+          </a:prstGeom>
+          <a:noFill/>
+        </p:spPr>
+        <p:txBody>
+          <a:bodyPr wrap="square">
+            <a:spAutoFit/>
+          </a:bodyPr>
+          <a:lstStyle/>
+          <a:p>
+            <a:pPr algn="ctr"/>
+            <a:r>
+              <a:rPr sz="4800" b="1" i="0">
                 <a:solidFill>
                   <a:srgbClr val="FFFFFF"/>
                 </a:solidFill>
                 <a:latin typeface="Arial"/>
               </a:rPr>
               <a:t>Eu não posso esquecê-la</a:t>
-            </a:r>
-          </a:p>
-        </p:txBody>
-      </p:sp>
-      <p:sp>
-        <p:nvSpPr>
-          <p:cNvPr id="3" name="TextBox 2"/>
-          <p:cNvSpPr txBox="1"/>
-          <p:nvPr/>
-        </p:nvSpPr>
-        <p:spPr>
-          <a:xfrm>
-            <a:off x="594360" y="3616452"/>
-            <a:ext cx="11002975" cy="347472"/>
-          </a:xfrm>
-          <a:prstGeom prst="rect">
-            <a:avLst/>
-          </a:prstGeom>
-          <a:noFill/>
-        </p:spPr>
-        <p:txBody>
-          <a:bodyPr wrap="square">
-            <a:spAutoFit/>
-          </a:bodyPr>
-          <a:lstStyle/>
-          <a:p>
-            <a:pPr algn="ctr"/>
-            <a:r>
-              <a:rPr sz="2200" b="0" i="1">
-                <a:solidFill>
-                  <a:srgbClr val="8C8C8C"/>
-                </a:solidFill>
-                <a:latin typeface="Arial"/>
-              </a:rPr>
-              <a:t/>
             </a:r>
           </a:p>
         </p:txBody>
@@ -5680,23 +5400,23 @@
         </p:nvSpPr>
         <p:spPr>
           <a:xfrm>
-            <a:off x="594360" y="1837944"/>
-            <a:ext cx="11002975" cy="685800"/>
-          </a:xfrm>
-          <a:prstGeom prst="rect">
-            <a:avLst/>
-          </a:prstGeom>
-          <a:noFill/>
-        </p:spPr>
-        <p:txBody>
-          <a:bodyPr wrap="square">
-            <a:spAutoFit/>
-          </a:bodyPr>
-          <a:lstStyle/>
-          <a:p>
-            <a:pPr algn="ctr"/>
-            <a:r>
-              <a:rPr sz="4400" b="1" i="0">
+            <a:off x="640080" y="1650492"/>
+            <a:ext cx="10911535" cy="731520"/>
+          </a:xfrm>
+          <a:prstGeom prst="rect">
+            <a:avLst/>
+          </a:prstGeom>
+          <a:noFill/>
+        </p:spPr>
+        <p:txBody>
+          <a:bodyPr wrap="square">
+            <a:spAutoFit/>
+          </a:bodyPr>
+          <a:lstStyle/>
+          <a:p>
+            <a:pPr algn="ctr"/>
+            <a:r>
+              <a:rPr sz="4800" b="1" i="0">
                 <a:solidFill>
                   <a:srgbClr val="FFFFFF"/>
                 </a:solidFill>
@@ -5715,8 +5435,8 @@
         </p:nvSpPr>
         <p:spPr>
           <a:xfrm>
-            <a:off x="594360" y="2560320"/>
-            <a:ext cx="11002975" cy="384048"/>
+            <a:off x="640080" y="2418588"/>
+            <a:ext cx="10911535" cy="365760"/>
           </a:xfrm>
           <a:prstGeom prst="rect">
             <a:avLst/>
@@ -5733,7 +5453,7 @@
             <a:r>
               <a:rPr sz="2400" b="0" i="1">
                 <a:solidFill>
-                  <a:srgbClr val="B4B4B4"/>
+                  <a:srgbClr val="AAAAAA"/>
                 </a:solidFill>
                 <a:latin typeface="Arial"/>
               </a:rPr>
@@ -5750,8 +5470,78 @@
         </p:nvSpPr>
         <p:spPr>
           <a:xfrm>
-            <a:off x="594360" y="2980944"/>
-            <a:ext cx="11002975" cy="347472"/>
+            <a:off x="640080" y="2985516"/>
+            <a:ext cx="10911535" cy="731520"/>
+          </a:xfrm>
+          <a:prstGeom prst="rect">
+            <a:avLst/>
+          </a:prstGeom>
+          <a:noFill/>
+        </p:spPr>
+        <p:txBody>
+          <a:bodyPr wrap="square">
+            <a:spAutoFit/>
+          </a:bodyPr>
+          <a:lstStyle/>
+          <a:p>
+            <a:pPr algn="ctr"/>
+            <a:r>
+              <a:rPr sz="4800" b="1" i="0">
+                <a:solidFill>
+                  <a:srgbClr val="FFFFFF"/>
+                </a:solidFill>
+                <a:latin typeface="Arial"/>
+              </a:rPr>
+              <a:t>守られることは既に明された</a:t>
+            </a:r>
+          </a:p>
+        </p:txBody>
+      </p:sp>
+      <p:sp>
+        <p:nvSpPr>
+          <p:cNvPr id="5" name="TextBox 4"/>
+          <p:cNvSpPr txBox="1"/>
+          <p:nvPr/>
+        </p:nvSpPr>
+        <p:spPr>
+          <a:xfrm>
+            <a:off x="640080" y="3753612"/>
+            <a:ext cx="10911535" cy="365760"/>
+          </a:xfrm>
+          <a:prstGeom prst="rect">
+            <a:avLst/>
+          </a:prstGeom>
+          <a:noFill/>
+        </p:spPr>
+        <p:txBody>
+          <a:bodyPr wrap="square">
+            <a:spAutoFit/>
+          </a:bodyPr>
+          <a:lstStyle/>
+          <a:p>
+            <a:pPr algn="ctr"/>
+            <a:r>
+              <a:rPr sz="2400" b="0" i="1">
+                <a:solidFill>
+                  <a:srgbClr val="AAAAAA"/>
+                </a:solidFill>
+                <a:latin typeface="Arial"/>
+              </a:rPr>
+              <a:t>mamorareru koto wa sude ni akasareta</a:t>
+            </a:r>
+          </a:p>
+        </p:txBody>
+      </p:sp>
+      <p:sp>
+        <p:nvSpPr>
+          <p:cNvPr id="6" name="TextBox 5"/>
+          <p:cNvSpPr txBox="1"/>
+          <p:nvPr/>
+        </p:nvSpPr>
+        <p:spPr>
+          <a:xfrm>
+            <a:off x="640080" y="4530852"/>
+            <a:ext cx="10911535" cy="310896"/>
           </a:xfrm>
           <a:prstGeom prst="rect">
             <a:avLst/>
@@ -5768,7 +5558,7 @@
             <a:r>
               <a:rPr sz="2000" b="0" i="1">
                 <a:solidFill>
-                  <a:srgbClr val="8C8C8C"/>
+                  <a:srgbClr val="828282"/>
                 </a:solidFill>
                 <a:latin typeface="Arial"/>
               </a:rPr>
@@ -5779,84 +5569,14 @@
       </p:sp>
       <p:sp>
         <p:nvSpPr>
-          <p:cNvPr id="5" name="TextBox 4"/>
-          <p:cNvSpPr txBox="1"/>
-          <p:nvPr/>
-        </p:nvSpPr>
-        <p:spPr>
-          <a:xfrm>
-            <a:off x="594360" y="3529584"/>
-            <a:ext cx="11002975" cy="685800"/>
-          </a:xfrm>
-          <a:prstGeom prst="rect">
-            <a:avLst/>
-          </a:prstGeom>
-          <a:noFill/>
-        </p:spPr>
-        <p:txBody>
-          <a:bodyPr wrap="square">
-            <a:spAutoFit/>
-          </a:bodyPr>
-          <a:lstStyle/>
-          <a:p>
-            <a:pPr algn="ctr"/>
-            <a:r>
-              <a:rPr sz="4400" b="1" i="0">
-                <a:solidFill>
-                  <a:srgbClr val="FFFFFF"/>
-                </a:solidFill>
-                <a:latin typeface="Arial"/>
-              </a:rPr>
-              <a:t>守られることは既に明された</a:t>
-            </a:r>
-          </a:p>
-        </p:txBody>
-      </p:sp>
-      <p:sp>
-        <p:nvSpPr>
-          <p:cNvPr id="6" name="TextBox 5"/>
-          <p:cNvSpPr txBox="1"/>
-          <p:nvPr/>
-        </p:nvSpPr>
-        <p:spPr>
-          <a:xfrm>
-            <a:off x="594360" y="4251960"/>
-            <a:ext cx="11002975" cy="384048"/>
-          </a:xfrm>
-          <a:prstGeom prst="rect">
-            <a:avLst/>
-          </a:prstGeom>
-          <a:noFill/>
-        </p:spPr>
-        <p:txBody>
-          <a:bodyPr wrap="square">
-            <a:spAutoFit/>
-          </a:bodyPr>
-          <a:lstStyle/>
-          <a:p>
-            <a:pPr algn="ctr"/>
-            <a:r>
-              <a:rPr sz="2400" b="0" i="1">
-                <a:solidFill>
-                  <a:srgbClr val="B4B4B4"/>
-                </a:solidFill>
-                <a:latin typeface="Arial"/>
-              </a:rPr>
-              <a:t>mamorareru koto wa sude ni akasareta</a:t>
-            </a:r>
-          </a:p>
-        </p:txBody>
-      </p:sp>
-      <p:sp>
-        <p:nvSpPr>
           <p:cNvPr id="7" name="TextBox 6"/>
           <p:cNvSpPr txBox="1"/>
           <p:nvPr/>
         </p:nvSpPr>
         <p:spPr>
           <a:xfrm>
-            <a:off x="594360" y="4672584"/>
-            <a:ext cx="11002975" cy="347472"/>
+            <a:off x="640080" y="4896612"/>
+            <a:ext cx="10911535" cy="310896"/>
           </a:xfrm>
           <a:prstGeom prst="rect">
             <a:avLst/>
@@ -5873,7 +5593,7 @@
             <a:r>
               <a:rPr sz="2000" b="0" i="1">
                 <a:solidFill>
-                  <a:srgbClr val="8C8C8C"/>
+                  <a:srgbClr val="828282"/>
                 </a:solidFill>
                 <a:latin typeface="Arial"/>
               </a:rPr>
@@ -5916,23 +5636,23 @@
         </p:nvSpPr>
         <p:spPr>
           <a:xfrm>
-            <a:off x="594360" y="1837944"/>
-            <a:ext cx="11002975" cy="685800"/>
-          </a:xfrm>
-          <a:prstGeom prst="rect">
-            <a:avLst/>
-          </a:prstGeom>
-          <a:noFill/>
-        </p:spPr>
-        <p:txBody>
-          <a:bodyPr wrap="square">
-            <a:spAutoFit/>
-          </a:bodyPr>
-          <a:lstStyle/>
-          <a:p>
-            <a:pPr algn="ctr"/>
-            <a:r>
-              <a:rPr sz="4400" b="1" i="0">
+            <a:off x="640080" y="1650492"/>
+            <a:ext cx="10911535" cy="731520"/>
+          </a:xfrm>
+          <a:prstGeom prst="rect">
+            <a:avLst/>
+          </a:prstGeom>
+          <a:noFill/>
+        </p:spPr>
+        <p:txBody>
+          <a:bodyPr wrap="square">
+            <a:spAutoFit/>
+          </a:bodyPr>
+          <a:lstStyle/>
+          <a:p>
+            <a:pPr algn="ctr"/>
+            <a:r>
+              <a:rPr sz="4800" b="1" i="0">
                 <a:solidFill>
                   <a:srgbClr val="FFFFFF"/>
                 </a:solidFill>
@@ -5951,8 +5671,8 @@
         </p:nvSpPr>
         <p:spPr>
           <a:xfrm>
-            <a:off x="594360" y="2560320"/>
-            <a:ext cx="11002975" cy="384048"/>
+            <a:off x="640080" y="2418588"/>
+            <a:ext cx="10911535" cy="365760"/>
           </a:xfrm>
           <a:prstGeom prst="rect">
             <a:avLst/>
@@ -5969,7 +5689,7 @@
             <a:r>
               <a:rPr sz="2400" b="0" i="1">
                 <a:solidFill>
-                  <a:srgbClr val="B4B4B4"/>
+                  <a:srgbClr val="AAAAAA"/>
                 </a:solidFill>
                 <a:latin typeface="Arial"/>
               </a:rPr>
@@ -5986,8 +5706,78 @@
         </p:nvSpPr>
         <p:spPr>
           <a:xfrm>
-            <a:off x="594360" y="2980944"/>
-            <a:ext cx="11002975" cy="347472"/>
+            <a:off x="640080" y="2985516"/>
+            <a:ext cx="10911535" cy="731520"/>
+          </a:xfrm>
+          <a:prstGeom prst="rect">
+            <a:avLst/>
+          </a:prstGeom>
+          <a:noFill/>
+        </p:spPr>
+        <p:txBody>
+          <a:bodyPr wrap="square">
+            <a:spAutoFit/>
+          </a:bodyPr>
+          <a:lstStyle/>
+          <a:p>
+            <a:pPr algn="ctr"/>
+            <a:r>
+              <a:rPr sz="4800" b="1" i="0">
+                <a:solidFill>
+                  <a:srgbClr val="FFFFFF"/>
+                </a:solidFill>
+                <a:latin typeface="Arial"/>
+              </a:rPr>
+              <a:t>約束を守られる神であると</a:t>
+            </a:r>
+          </a:p>
+        </p:txBody>
+      </p:sp>
+      <p:sp>
+        <p:nvSpPr>
+          <p:cNvPr id="5" name="TextBox 4"/>
+          <p:cNvSpPr txBox="1"/>
+          <p:nvPr/>
+        </p:nvSpPr>
+        <p:spPr>
+          <a:xfrm>
+            <a:off x="640080" y="3753612"/>
+            <a:ext cx="10911535" cy="365760"/>
+          </a:xfrm>
+          <a:prstGeom prst="rect">
+            <a:avLst/>
+          </a:prstGeom>
+          <a:noFill/>
+        </p:spPr>
+        <p:txBody>
+          <a:bodyPr wrap="square">
+            <a:spAutoFit/>
+          </a:bodyPr>
+          <a:lstStyle/>
+          <a:p>
+            <a:pPr algn="ctr"/>
+            <a:r>
+              <a:rPr sz="2400" b="0" i="1">
+                <a:solidFill>
+                  <a:srgbClr val="AAAAAA"/>
+                </a:solidFill>
+                <a:latin typeface="Arial"/>
+              </a:rPr>
+              <a:t>yakusoku wo mamorareru kami dearu to</a:t>
+            </a:r>
+          </a:p>
+        </p:txBody>
+      </p:sp>
+      <p:sp>
+        <p:nvSpPr>
+          <p:cNvPr id="6" name="TextBox 5"/>
+          <p:cNvSpPr txBox="1"/>
+          <p:nvPr/>
+        </p:nvSpPr>
+        <p:spPr>
+          <a:xfrm>
+            <a:off x="640080" y="4530852"/>
+            <a:ext cx="10911535" cy="310896"/>
           </a:xfrm>
           <a:prstGeom prst="rect">
             <a:avLst/>
@@ -6004,7 +5794,7 @@
             <a:r>
               <a:rPr sz="2000" b="0" i="1">
                 <a:solidFill>
-                  <a:srgbClr val="8C8C8C"/>
+                  <a:srgbClr val="828282"/>
                 </a:solidFill>
                 <a:latin typeface="Arial"/>
               </a:rPr>
@@ -6015,84 +5805,14 @@
       </p:sp>
       <p:sp>
         <p:nvSpPr>
-          <p:cNvPr id="5" name="TextBox 4"/>
-          <p:cNvSpPr txBox="1"/>
-          <p:nvPr/>
-        </p:nvSpPr>
-        <p:spPr>
-          <a:xfrm>
-            <a:off x="594360" y="3529584"/>
-            <a:ext cx="11002975" cy="685800"/>
-          </a:xfrm>
-          <a:prstGeom prst="rect">
-            <a:avLst/>
-          </a:prstGeom>
-          <a:noFill/>
-        </p:spPr>
-        <p:txBody>
-          <a:bodyPr wrap="square">
-            <a:spAutoFit/>
-          </a:bodyPr>
-          <a:lstStyle/>
-          <a:p>
-            <a:pPr algn="ctr"/>
-            <a:r>
-              <a:rPr sz="4400" b="1" i="0">
-                <a:solidFill>
-                  <a:srgbClr val="FFFFFF"/>
-                </a:solidFill>
-                <a:latin typeface="Arial"/>
-              </a:rPr>
-              <a:t>約束を守られる神であると</a:t>
-            </a:r>
-          </a:p>
-        </p:txBody>
-      </p:sp>
-      <p:sp>
-        <p:nvSpPr>
-          <p:cNvPr id="6" name="TextBox 5"/>
-          <p:cNvSpPr txBox="1"/>
-          <p:nvPr/>
-        </p:nvSpPr>
-        <p:spPr>
-          <a:xfrm>
-            <a:off x="594360" y="4251960"/>
-            <a:ext cx="11002975" cy="384048"/>
-          </a:xfrm>
-          <a:prstGeom prst="rect">
-            <a:avLst/>
-          </a:prstGeom>
-          <a:noFill/>
-        </p:spPr>
-        <p:txBody>
-          <a:bodyPr wrap="square">
-            <a:spAutoFit/>
-          </a:bodyPr>
-          <a:lstStyle/>
-          <a:p>
-            <a:pPr algn="ctr"/>
-            <a:r>
-              <a:rPr sz="2400" b="0" i="1">
-                <a:solidFill>
-                  <a:srgbClr val="B4B4B4"/>
-                </a:solidFill>
-                <a:latin typeface="Arial"/>
-              </a:rPr>
-              <a:t>yakusoku wo mamorareru kami dearu to</a:t>
-            </a:r>
-          </a:p>
-        </p:txBody>
-      </p:sp>
-      <p:sp>
-        <p:nvSpPr>
           <p:cNvPr id="7" name="TextBox 6"/>
           <p:cNvSpPr txBox="1"/>
           <p:nvPr/>
         </p:nvSpPr>
         <p:spPr>
           <a:xfrm>
-            <a:off x="594360" y="4672584"/>
-            <a:ext cx="11002975" cy="347472"/>
+            <a:off x="640080" y="4896612"/>
+            <a:ext cx="10911535" cy="310896"/>
           </a:xfrm>
           <a:prstGeom prst="rect">
             <a:avLst/>
@@ -6109,7 +5829,7 @@
             <a:r>
               <a:rPr sz="2000" b="0" i="1">
                 <a:solidFill>
-                  <a:srgbClr val="8C8C8C"/>
+                  <a:srgbClr val="828282"/>
                 </a:solidFill>
                 <a:latin typeface="Arial"/>
               </a:rPr>

--- a/output_pptx/Promises.pptx
+++ b/output_pptx/Promises.pptx
@@ -4222,6 +4222,76 @@
           </a:p>
         </p:txBody>
       </p:sp>
+      <p:sp>
+        <p:nvSpPr>
+          <p:cNvPr id="4" name="TextBox 3"/>
+          <p:cNvSpPr txBox="1"/>
+          <p:nvPr/>
+        </p:nvSpPr>
+        <p:spPr>
+          <a:xfrm>
+            <a:off x="640080" y="4128516"/>
+            <a:ext cx="10911535" cy="310896"/>
+          </a:xfrm>
+          <a:prstGeom prst="rect">
+            <a:avLst/>
+          </a:prstGeom>
+          <a:noFill/>
+        </p:spPr>
+        <p:txBody>
+          <a:bodyPr wrap="square">
+            <a:spAutoFit/>
+          </a:bodyPr>
+          <a:lstStyle/>
+          <a:p>
+            <a:pPr algn="ctr"/>
+            <a:r>
+              <a:rPr sz="2000" b="0" i="0">
+                <a:solidFill>
+                  <a:srgbClr val="828282"/>
+                </a:solidFill>
+                <a:latin typeface="Arial"/>
+              </a:rPr>
+              <a:t>あなたの愛は命そのものより素晴らしいから</a:t>
+            </a:r>
+          </a:p>
+        </p:txBody>
+      </p:sp>
+      <p:sp>
+        <p:nvSpPr>
+          <p:cNvPr id="5" name="TextBox 4"/>
+          <p:cNvSpPr txBox="1"/>
+          <p:nvPr/>
+        </p:nvSpPr>
+        <p:spPr>
+          <a:xfrm>
+            <a:off x="640080" y="4494276"/>
+            <a:ext cx="10911535" cy="310896"/>
+          </a:xfrm>
+          <a:prstGeom prst="rect">
+            <a:avLst/>
+          </a:prstGeom>
+          <a:noFill/>
+        </p:spPr>
+        <p:txBody>
+          <a:bodyPr wrap="square">
+            <a:spAutoFit/>
+          </a:bodyPr>
+          <a:lstStyle/>
+          <a:p>
+            <a:pPr algn="ctr"/>
+            <a:r>
+              <a:rPr sz="2000" b="0" i="0">
+                <a:solidFill>
+                  <a:srgbClr val="828282"/>
+                </a:solidFill>
+                <a:latin typeface="Arial"/>
+              </a:rPr>
+              <a:t>今、太陽が輝いています</a:t>
+            </a:r>
+          </a:p>
+        </p:txBody>
+      </p:sp>
     </p:spTree>
   </p:cSld>
   <p:clrMapOvr>
@@ -4615,6 +4685,41 @@
           </a:p>
         </p:txBody>
       </p:sp>
+      <p:sp>
+        <p:nvSpPr>
+          <p:cNvPr id="3" name="TextBox 2"/>
+          <p:cNvSpPr txBox="1"/>
+          <p:nvPr/>
+        </p:nvSpPr>
+        <p:spPr>
+          <a:xfrm>
+            <a:off x="640080" y="3845052"/>
+            <a:ext cx="10911535" cy="310896"/>
+          </a:xfrm>
+          <a:prstGeom prst="rect">
+            <a:avLst/>
+          </a:prstGeom>
+          <a:noFill/>
+        </p:spPr>
+        <p:txBody>
+          <a:bodyPr wrap="square">
+            <a:spAutoFit/>
+          </a:bodyPr>
+          <a:lstStyle/>
+          <a:p>
+            <a:pPr algn="ctr"/>
+            <a:r>
+              <a:rPr sz="2000" b="0" i="0">
+                <a:solidFill>
+                  <a:srgbClr val="828282"/>
+                </a:solidFill>
+                <a:latin typeface="Arial"/>
+              </a:rPr>
+              <a:t>私はそれを忘れることができません</a:t>
+            </a:r>
+          </a:p>
+        </p:txBody>
+      </p:sp>
     </p:spTree>
   </p:cSld>
   <p:clrMapOvr>
@@ -4711,6 +4816,76 @@
           </a:p>
         </p:txBody>
       </p:sp>
+      <p:sp>
+        <p:nvSpPr>
+          <p:cNvPr id="4" name="TextBox 3"/>
+          <p:cNvSpPr txBox="1"/>
+          <p:nvPr/>
+        </p:nvSpPr>
+        <p:spPr>
+          <a:xfrm>
+            <a:off x="640080" y="4128516"/>
+            <a:ext cx="10911535" cy="310896"/>
+          </a:xfrm>
+          <a:prstGeom prst="rect">
+            <a:avLst/>
+          </a:prstGeom>
+          <a:noFill/>
+        </p:spPr>
+        <p:txBody>
+          <a:bodyPr wrap="square">
+            <a:spAutoFit/>
+          </a:bodyPr>
+          <a:lstStyle/>
+          <a:p>
+            <a:pPr algn="ctr"/>
+            <a:r>
+              <a:rPr sz="2000" b="0" i="0">
+                <a:solidFill>
+                  <a:srgbClr val="828282"/>
+                </a:solidFill>
+                <a:latin typeface="Arial"/>
+              </a:rPr>
+              <a:t>イエス、あなたは私の心を変えてくれました</a:t>
+            </a:r>
+          </a:p>
+        </p:txBody>
+      </p:sp>
+      <p:sp>
+        <p:nvSpPr>
+          <p:cNvPr id="5" name="TextBox 4"/>
+          <p:cNvSpPr txBox="1"/>
+          <p:nvPr/>
+        </p:nvSpPr>
+        <p:spPr>
+          <a:xfrm>
+            <a:off x="640080" y="4494276"/>
+            <a:ext cx="10911535" cy="310896"/>
+          </a:xfrm>
+          <a:prstGeom prst="rect">
+            <a:avLst/>
+          </a:prstGeom>
+          <a:noFill/>
+        </p:spPr>
+        <p:txBody>
+          <a:bodyPr wrap="square">
+            <a:spAutoFit/>
+          </a:bodyPr>
+          <a:lstStyle/>
+          <a:p>
+            <a:pPr algn="ctr"/>
+            <a:r>
+              <a:rPr sz="2000" b="0" i="0">
+                <a:solidFill>
+                  <a:srgbClr val="828282"/>
+                </a:solidFill>
+                <a:latin typeface="Arial"/>
+              </a:rPr>
+              <a:t>私はあなたが造られた道を歩んでいます</a:t>
+            </a:r>
+          </a:p>
+        </p:txBody>
+      </p:sp>
     </p:spTree>
   </p:cSld>
   <p:clrMapOvr>
@@ -4973,6 +5148,76 @@
           </a:p>
         </p:txBody>
       </p:sp>
+      <p:sp>
+        <p:nvSpPr>
+          <p:cNvPr id="4" name="TextBox 3"/>
+          <p:cNvSpPr txBox="1"/>
+          <p:nvPr/>
+        </p:nvSpPr>
+        <p:spPr>
+          <a:xfrm>
+            <a:off x="640080" y="4128516"/>
+            <a:ext cx="10911535" cy="310896"/>
+          </a:xfrm>
+          <a:prstGeom prst="rect">
+            <a:avLst/>
+          </a:prstGeom>
+          <a:noFill/>
+        </p:spPr>
+        <p:txBody>
+          <a:bodyPr wrap="square">
+            <a:spAutoFit/>
+          </a:bodyPr>
+          <a:lstStyle/>
+          <a:p>
+            <a:pPr algn="ctr"/>
+            <a:r>
+              <a:rPr sz="2000" b="0" i="0">
+                <a:solidFill>
+                  <a:srgbClr val="828282"/>
+                </a:solidFill>
+                <a:latin typeface="Arial"/>
+              </a:rPr>
+              <a:t>あなたの愛は命そのものより素晴らしいから</a:t>
+            </a:r>
+          </a:p>
+        </p:txBody>
+      </p:sp>
+      <p:sp>
+        <p:nvSpPr>
+          <p:cNvPr id="5" name="TextBox 4"/>
+          <p:cNvSpPr txBox="1"/>
+          <p:nvPr/>
+        </p:nvSpPr>
+        <p:spPr>
+          <a:xfrm>
+            <a:off x="640080" y="4494276"/>
+            <a:ext cx="10911535" cy="310896"/>
+          </a:xfrm>
+          <a:prstGeom prst="rect">
+            <a:avLst/>
+          </a:prstGeom>
+          <a:noFill/>
+        </p:spPr>
+        <p:txBody>
+          <a:bodyPr wrap="square">
+            <a:spAutoFit/>
+          </a:bodyPr>
+          <a:lstStyle/>
+          <a:p>
+            <a:pPr algn="ctr"/>
+            <a:r>
+              <a:rPr sz="2000" b="0" i="0">
+                <a:solidFill>
+                  <a:srgbClr val="828282"/>
+                </a:solidFill>
+                <a:latin typeface="Arial"/>
+              </a:rPr>
+              <a:t>今、太陽が輝いています</a:t>
+            </a:r>
+          </a:p>
+        </p:txBody>
+      </p:sp>
     </p:spTree>
   </p:cSld>
   <p:clrMapOvr>
@@ -5362,6 +5607,41 @@
                 <a:latin typeface="Arial"/>
               </a:rPr>
               <a:t>Eu não posso esquecê-la</a:t>
+            </a:r>
+          </a:p>
+        </p:txBody>
+      </p:sp>
+      <p:sp>
+        <p:nvSpPr>
+          <p:cNvPr id="3" name="TextBox 2"/>
+          <p:cNvSpPr txBox="1"/>
+          <p:nvPr/>
+        </p:nvSpPr>
+        <p:spPr>
+          <a:xfrm>
+            <a:off x="640080" y="3845052"/>
+            <a:ext cx="10911535" cy="310896"/>
+          </a:xfrm>
+          <a:prstGeom prst="rect">
+            <a:avLst/>
+          </a:prstGeom>
+          <a:noFill/>
+        </p:spPr>
+        <p:txBody>
+          <a:bodyPr wrap="square">
+            <a:spAutoFit/>
+          </a:bodyPr>
+          <a:lstStyle/>
+          <a:p>
+            <a:pPr algn="ctr"/>
+            <a:r>
+              <a:rPr sz="2000" b="0" i="0">
+                <a:solidFill>
+                  <a:srgbClr val="828282"/>
+                </a:solidFill>
+                <a:latin typeface="Arial"/>
+              </a:rPr>
+              <a:t>私はそれを忘れることができません</a:t>
             </a:r>
           </a:p>
         </p:txBody>
